--- a/public/fun/pack/pptx/talk/발표템플릿_17_교육·강의_해바라기담장.pptx
+++ b/public/fun/pack/pptx/talk/발표템플릿_17_교육·강의_해바라기담장.pptx
@@ -3347,7 +3347,7 @@
             <a:r>
               <a:rPr sz="3600" b="1" i="0">
                 <a:solidFill>
-                  <a:srgbClr val="6E570C"/>
+                  <a:srgbClr val="115F25"/>
                 </a:solidFill>
               </a:rPr>
               <a:t>발표 제목을 입력하세요</a:t>
@@ -3385,7 +3385,7 @@
             <a:r>
               <a:rPr sz="1700" b="0" i="1">
                 <a:solidFill>
-                  <a:srgbClr val="6E570C"/>
+                  <a:srgbClr val="115F25"/>
                 </a:solidFill>
               </a:rPr>
               <a:t>받아 적지 않아도 되게 자료를 드립니다</a:t>
@@ -3460,7 +3460,7 @@
     <p:bg>
       <p:bgPr>
         <a:solidFill>
-          <a:srgbClr val="CAA016"/>
+          <a:srgbClr val="26C54E"/>
         </a:solidFill>
         <a:effectLst/>
       </p:bgPr>
@@ -3533,7 +3533,7 @@
             <a:r>
               <a:rPr sz="3000" b="1" i="0">
                 <a:solidFill>
-                  <a:srgbClr val="6E570C"/>
+                  <a:srgbClr val="115F25"/>
                 </a:solidFill>
               </a:rPr>
               <a:t>목차</a:t>
@@ -3558,11 +3558,11 @@
             </a:avLst>
           </a:prstGeom>
           <a:solidFill>
-            <a:srgbClr val="FDF9ED"/>
+            <a:srgbClr val="EEFCF1"/>
           </a:solidFill>
           <a:ln w="12700">
             <a:solidFill>
-              <a:srgbClr val="FAEEC6"/>
+              <a:srgbClr val="D1FADC"/>
             </a:solidFill>
           </a:ln>
         </p:spPr>
@@ -3589,7 +3589,7 @@
             <a:avLst/>
           </a:prstGeom>
           <a:solidFill>
-            <a:srgbClr val="CAA016"/>
+            <a:srgbClr val="26C54E"/>
           </a:solidFill>
           <a:ln>
             <a:noFill/>
@@ -3647,7 +3647,7 @@
             <a:r>
               <a:rPr sz="1800" b="1" i="0">
                 <a:solidFill>
-                  <a:srgbClr val="6E570C"/>
+                  <a:srgbClr val="115F25"/>
                 </a:solidFill>
               </a:rPr>
               <a:t>오늘의 목표</a:t>
@@ -3710,11 +3710,11 @@
             </a:avLst>
           </a:prstGeom>
           <a:solidFill>
-            <a:srgbClr val="FDF9ED"/>
+            <a:srgbClr val="EEFCF1"/>
           </a:solidFill>
           <a:ln w="12700">
             <a:solidFill>
-              <a:srgbClr val="FAEEC6"/>
+              <a:srgbClr val="D1FADC"/>
             </a:solidFill>
           </a:ln>
         </p:spPr>
@@ -3741,7 +3741,7 @@
             <a:avLst/>
           </a:prstGeom>
           <a:solidFill>
-            <a:srgbClr val="CAA016"/>
+            <a:srgbClr val="26C54E"/>
           </a:solidFill>
           <a:ln>
             <a:noFill/>
@@ -3799,7 +3799,7 @@
             <a:r>
               <a:rPr sz="1800" b="1" i="0">
                 <a:solidFill>
-                  <a:srgbClr val="6E570C"/>
+                  <a:srgbClr val="115F25"/>
                 </a:solidFill>
               </a:rPr>
               <a:t>핵심 개념</a:t>
@@ -3862,11 +3862,11 @@
             </a:avLst>
           </a:prstGeom>
           <a:solidFill>
-            <a:srgbClr val="FDF9ED"/>
+            <a:srgbClr val="EEFCF1"/>
           </a:solidFill>
           <a:ln w="12700">
             <a:solidFill>
-              <a:srgbClr val="FAEEC6"/>
+              <a:srgbClr val="D1FADC"/>
             </a:solidFill>
           </a:ln>
         </p:spPr>
@@ -3893,7 +3893,7 @@
             <a:avLst/>
           </a:prstGeom>
           <a:solidFill>
-            <a:srgbClr val="CAA016"/>
+            <a:srgbClr val="26C54E"/>
           </a:solidFill>
           <a:ln>
             <a:noFill/>
@@ -3951,7 +3951,7 @@
             <a:r>
               <a:rPr sz="1800" b="1" i="0">
                 <a:solidFill>
-                  <a:srgbClr val="6E570C"/>
+                  <a:srgbClr val="115F25"/>
                 </a:solidFill>
               </a:rPr>
               <a:t>실습과 예시</a:t>
@@ -4014,11 +4014,11 @@
             </a:avLst>
           </a:prstGeom>
           <a:solidFill>
-            <a:srgbClr val="FDF9ED"/>
+            <a:srgbClr val="EEFCF1"/>
           </a:solidFill>
           <a:ln w="12700">
             <a:solidFill>
-              <a:srgbClr val="FAEEC6"/>
+              <a:srgbClr val="D1FADC"/>
             </a:solidFill>
           </a:ln>
         </p:spPr>
@@ -4045,7 +4045,7 @@
             <a:avLst/>
           </a:prstGeom>
           <a:solidFill>
-            <a:srgbClr val="CAA016"/>
+            <a:srgbClr val="26C54E"/>
           </a:solidFill>
           <a:ln>
             <a:noFill/>
@@ -4103,7 +4103,7 @@
             <a:r>
               <a:rPr sz="1800" b="1" i="0">
                 <a:solidFill>
-                  <a:srgbClr val="6E570C"/>
+                  <a:srgbClr val="115F25"/>
                 </a:solidFill>
               </a:rPr>
               <a:t>정리와 질문</a:t>
@@ -4163,7 +4163,7 @@
     <p:bg>
       <p:bgPr>
         <a:solidFill>
-          <a:srgbClr val="CAA016"/>
+          <a:srgbClr val="26C54E"/>
         </a:solidFill>
         <a:effectLst/>
       </p:bgPr>
@@ -4236,7 +4236,7 @@
             <a:r>
               <a:rPr sz="3000" b="1" i="0">
                 <a:solidFill>
-                  <a:srgbClr val="6E570C"/>
+                  <a:srgbClr val="115F25"/>
                 </a:solidFill>
               </a:rPr>
               <a:t>핵심 메시지</a:t>
@@ -4274,7 +4274,7 @@
             <a:r>
               <a:rPr sz="2600" b="1" i="0">
                 <a:solidFill>
-                  <a:srgbClr val="6E570C"/>
+                  <a:srgbClr val="115F25"/>
                 </a:solidFill>
               </a:rPr>
               <a:t>한 문장으로 말하면 — 여기에 핵심 메시지를 입력하세요</a:t>
@@ -4299,11 +4299,11 @@
             </a:avLst>
           </a:prstGeom>
           <a:solidFill>
-            <a:srgbClr val="FDF9ED"/>
+            <a:srgbClr val="EEFCF1"/>
           </a:solidFill>
           <a:ln w="15875">
             <a:solidFill>
-              <a:srgbClr val="FAEEC6"/>
+              <a:srgbClr val="D1FADC"/>
             </a:solidFill>
           </a:ln>
         </p:spPr>
@@ -4330,7 +4330,7 @@
             <a:avLst/>
           </a:prstGeom>
           <a:solidFill>
-            <a:srgbClr val="CAA016"/>
+            <a:srgbClr val="26C54E"/>
           </a:solidFill>
           <a:ln>
             <a:noFill/>
@@ -4388,7 +4388,7 @@
             <a:r>
               <a:rPr sz="1800" b="1" i="0">
                 <a:solidFill>
-                  <a:srgbClr val="6E570C"/>
+                  <a:srgbClr val="115F25"/>
                 </a:solidFill>
               </a:rPr>
               <a:t>알아야 할 것</a:t>
@@ -4466,11 +4466,11 @@
             </a:avLst>
           </a:prstGeom>
           <a:solidFill>
-            <a:srgbClr val="FDF9ED"/>
+            <a:srgbClr val="EEFCF1"/>
           </a:solidFill>
           <a:ln w="15875">
             <a:solidFill>
-              <a:srgbClr val="FAEEC6"/>
+              <a:srgbClr val="D1FADC"/>
             </a:solidFill>
           </a:ln>
         </p:spPr>
@@ -4497,7 +4497,7 @@
             <a:avLst/>
           </a:prstGeom>
           <a:solidFill>
-            <a:srgbClr val="CAA016"/>
+            <a:srgbClr val="26C54E"/>
           </a:solidFill>
           <a:ln>
             <a:noFill/>
@@ -4555,7 +4555,7 @@
             <a:r>
               <a:rPr sz="1800" b="1" i="0">
                 <a:solidFill>
-                  <a:srgbClr val="6E570C"/>
+                  <a:srgbClr val="115F25"/>
                 </a:solidFill>
               </a:rPr>
               <a:t>해 볼 것</a:t>
@@ -4633,11 +4633,11 @@
             </a:avLst>
           </a:prstGeom>
           <a:solidFill>
-            <a:srgbClr val="FDF9ED"/>
+            <a:srgbClr val="EEFCF1"/>
           </a:solidFill>
           <a:ln w="15875">
             <a:solidFill>
-              <a:srgbClr val="FAEEC6"/>
+              <a:srgbClr val="D1FADC"/>
             </a:solidFill>
           </a:ln>
         </p:spPr>
@@ -4664,7 +4664,7 @@
             <a:avLst/>
           </a:prstGeom>
           <a:solidFill>
-            <a:srgbClr val="CAA016"/>
+            <a:srgbClr val="26C54E"/>
           </a:solidFill>
           <a:ln>
             <a:noFill/>
@@ -4722,7 +4722,7 @@
             <a:r>
               <a:rPr sz="1800" b="1" i="0">
                 <a:solidFill>
-                  <a:srgbClr val="6E570C"/>
+                  <a:srgbClr val="115F25"/>
                 </a:solidFill>
               </a:rPr>
               <a:t>기억할 것</a:t>
@@ -4797,7 +4797,7 @@
     <p:bg>
       <p:bgPr>
         <a:solidFill>
-          <a:srgbClr val="CAA016"/>
+          <a:srgbClr val="26C54E"/>
         </a:solidFill>
         <a:effectLst/>
       </p:bgPr>
@@ -4870,7 +4870,7 @@
             <a:r>
               <a:rPr sz="3000" b="1" i="0">
                 <a:solidFill>
-                  <a:srgbClr val="6E570C"/>
+                  <a:srgbClr val="115F25"/>
                 </a:solidFill>
               </a:rPr>
               <a:t>한눈에 비교</a:t>
@@ -4895,11 +4895,11 @@
             </a:avLst>
           </a:prstGeom>
           <a:solidFill>
-            <a:srgbClr val="FDF9ED"/>
+            <a:srgbClr val="EEFCF1"/>
           </a:solidFill>
           <a:ln w="12700">
             <a:solidFill>
-              <a:srgbClr val="FAEEC6"/>
+              <a:srgbClr val="D1FADC"/>
             </a:solidFill>
           </a:ln>
         </p:spPr>
@@ -4928,7 +4928,7 @@
             </a:avLst>
           </a:prstGeom>
           <a:solidFill>
-            <a:srgbClr val="CAA016"/>
+            <a:srgbClr val="26C54E"/>
           </a:solidFill>
           <a:ln>
             <a:noFill/>
@@ -5080,11 +5080,11 @@
             </a:avLst>
           </a:prstGeom>
           <a:solidFill>
-            <a:srgbClr val="FAEEC6"/>
+            <a:srgbClr val="D1FADC"/>
           </a:solidFill>
           <a:ln w="12700">
             <a:solidFill>
-              <a:srgbClr val="FAEEC6"/>
+              <a:srgbClr val="D1FADC"/>
             </a:solidFill>
           </a:ln>
         </p:spPr>
@@ -5113,7 +5113,7 @@
             </a:avLst>
           </a:prstGeom>
           <a:solidFill>
-            <a:srgbClr val="6E570C"/>
+            <a:srgbClr val="115F25"/>
           </a:solidFill>
           <a:ln>
             <a:noFill/>
@@ -5262,7 +5262,7 @@
     <p:bg>
       <p:bgPr>
         <a:solidFill>
-          <a:srgbClr val="CAA016"/>
+          <a:srgbClr val="26C54E"/>
         </a:solidFill>
         <a:effectLst/>
       </p:bgPr>
@@ -5335,7 +5335,7 @@
             <a:r>
               <a:rPr sz="3000" b="1" i="0">
                 <a:solidFill>
-                  <a:srgbClr val="6E570C"/>
+                  <a:srgbClr val="115F25"/>
                 </a:solidFill>
               </a:rPr>
               <a:t>일정·현황</a:t>
@@ -5387,30 +5387,30 @@
                   <a:tcPr anchor="ctr" marL="73152" marR="73152">
                     <a:lnL w="9525" cap="flat" cmpd="sng" algn="ctr">
                       <a:solidFill>
-                        <a:srgbClr val="CAA016"/>
+                        <a:srgbClr val="26C54E"/>
                       </a:solidFill>
                       <a:prstDash val="solid"/>
                     </a:lnL>
                     <a:lnR w="9525" cap="flat" cmpd="sng" algn="ctr">
                       <a:solidFill>
-                        <a:srgbClr val="CAA016"/>
+                        <a:srgbClr val="26C54E"/>
                       </a:solidFill>
                       <a:prstDash val="solid"/>
                     </a:lnR>
                     <a:lnT w="9525" cap="flat" cmpd="sng" algn="ctr">
                       <a:solidFill>
-                        <a:srgbClr val="CAA016"/>
+                        <a:srgbClr val="26C54E"/>
                       </a:solidFill>
                       <a:prstDash val="solid"/>
                     </a:lnT>
                     <a:lnB w="9525" cap="flat" cmpd="sng" algn="ctr">
                       <a:solidFill>
-                        <a:srgbClr val="CAA016"/>
+                        <a:srgbClr val="26C54E"/>
                       </a:solidFill>
                       <a:prstDash val="solid"/>
                     </a:lnB>
                     <a:solidFill>
-                      <a:srgbClr val="CAA016"/>
+                      <a:srgbClr val="26C54E"/>
                     </a:solidFill>
                   </a:tcPr>
                 </a:tc>
@@ -5433,30 +5433,30 @@
                   <a:tcPr anchor="ctr" marL="73152" marR="73152">
                     <a:lnL w="9525" cap="flat" cmpd="sng" algn="ctr">
                       <a:solidFill>
-                        <a:srgbClr val="CAA016"/>
+                        <a:srgbClr val="26C54E"/>
                       </a:solidFill>
                       <a:prstDash val="solid"/>
                     </a:lnL>
                     <a:lnR w="9525" cap="flat" cmpd="sng" algn="ctr">
                       <a:solidFill>
-                        <a:srgbClr val="CAA016"/>
+                        <a:srgbClr val="26C54E"/>
                       </a:solidFill>
                       <a:prstDash val="solid"/>
                     </a:lnR>
                     <a:lnT w="9525" cap="flat" cmpd="sng" algn="ctr">
                       <a:solidFill>
-                        <a:srgbClr val="CAA016"/>
+                        <a:srgbClr val="26C54E"/>
                       </a:solidFill>
                       <a:prstDash val="solid"/>
                     </a:lnT>
                     <a:lnB w="9525" cap="flat" cmpd="sng" algn="ctr">
                       <a:solidFill>
-                        <a:srgbClr val="CAA016"/>
+                        <a:srgbClr val="26C54E"/>
                       </a:solidFill>
                       <a:prstDash val="solid"/>
                     </a:lnB>
                     <a:solidFill>
-                      <a:srgbClr val="CAA016"/>
+                      <a:srgbClr val="26C54E"/>
                     </a:solidFill>
                   </a:tcPr>
                 </a:tc>
@@ -5479,30 +5479,30 @@
                   <a:tcPr anchor="ctr" marL="73152" marR="73152">
                     <a:lnL w="9525" cap="flat" cmpd="sng" algn="ctr">
                       <a:solidFill>
-                        <a:srgbClr val="CAA016"/>
+                        <a:srgbClr val="26C54E"/>
                       </a:solidFill>
                       <a:prstDash val="solid"/>
                     </a:lnL>
                     <a:lnR w="9525" cap="flat" cmpd="sng" algn="ctr">
                       <a:solidFill>
-                        <a:srgbClr val="CAA016"/>
+                        <a:srgbClr val="26C54E"/>
                       </a:solidFill>
                       <a:prstDash val="solid"/>
                     </a:lnR>
                     <a:lnT w="9525" cap="flat" cmpd="sng" algn="ctr">
                       <a:solidFill>
-                        <a:srgbClr val="CAA016"/>
+                        <a:srgbClr val="26C54E"/>
                       </a:solidFill>
                       <a:prstDash val="solid"/>
                     </a:lnT>
                     <a:lnB w="9525" cap="flat" cmpd="sng" algn="ctr">
                       <a:solidFill>
-                        <a:srgbClr val="CAA016"/>
+                        <a:srgbClr val="26C54E"/>
                       </a:solidFill>
                       <a:prstDash val="solid"/>
                     </a:lnB>
                     <a:solidFill>
-                      <a:srgbClr val="CAA016"/>
+                      <a:srgbClr val="26C54E"/>
                     </a:solidFill>
                   </a:tcPr>
                 </a:tc>
@@ -5525,30 +5525,30 @@
                   <a:tcPr anchor="ctr" marL="73152" marR="73152">
                     <a:lnL w="9525" cap="flat" cmpd="sng" algn="ctr">
                       <a:solidFill>
-                        <a:srgbClr val="CAA016"/>
+                        <a:srgbClr val="26C54E"/>
                       </a:solidFill>
                       <a:prstDash val="solid"/>
                     </a:lnL>
                     <a:lnR w="9525" cap="flat" cmpd="sng" algn="ctr">
                       <a:solidFill>
-                        <a:srgbClr val="CAA016"/>
+                        <a:srgbClr val="26C54E"/>
                       </a:solidFill>
                       <a:prstDash val="solid"/>
                     </a:lnR>
                     <a:lnT w="9525" cap="flat" cmpd="sng" algn="ctr">
                       <a:solidFill>
-                        <a:srgbClr val="CAA016"/>
+                        <a:srgbClr val="26C54E"/>
                       </a:solidFill>
                       <a:prstDash val="solid"/>
                     </a:lnT>
                     <a:lnB w="9525" cap="flat" cmpd="sng" algn="ctr">
                       <a:solidFill>
-                        <a:srgbClr val="CAA016"/>
+                        <a:srgbClr val="26C54E"/>
                       </a:solidFill>
                       <a:prstDash val="solid"/>
                     </a:lnB>
                     <a:solidFill>
-                      <a:srgbClr val="CAA016"/>
+                      <a:srgbClr val="26C54E"/>
                     </a:solidFill>
                   </a:tcPr>
                 </a:tc>
@@ -5563,7 +5563,7 @@
                       <a:r>
                         <a:rPr sz="1500" b="1">
                           <a:solidFill>
-                            <a:srgbClr val="6E570C"/>
+                            <a:srgbClr val="115F25"/>
                           </a:solidFill>
                         </a:rPr>
                         <a:t>1</a:t>
@@ -5573,30 +5573,30 @@
                   <a:tcPr anchor="ctr" marL="73152" marR="73152">
                     <a:lnL w="9525" cap="flat" cmpd="sng" algn="ctr">
                       <a:solidFill>
-                        <a:srgbClr val="FAEEC6"/>
+                        <a:srgbClr val="D1FADC"/>
                       </a:solidFill>
                       <a:prstDash val="solid"/>
                     </a:lnL>
                     <a:lnR w="9525" cap="flat" cmpd="sng" algn="ctr">
                       <a:solidFill>
-                        <a:srgbClr val="FAEEC6"/>
+                        <a:srgbClr val="D1FADC"/>
                       </a:solidFill>
                       <a:prstDash val="solid"/>
                     </a:lnR>
                     <a:lnT w="9525" cap="flat" cmpd="sng" algn="ctr">
                       <a:solidFill>
-                        <a:srgbClr val="FAEEC6"/>
+                        <a:srgbClr val="D1FADC"/>
                       </a:solidFill>
                       <a:prstDash val="solid"/>
                     </a:lnT>
                     <a:lnB w="9525" cap="flat" cmpd="sng" algn="ctr">
                       <a:solidFill>
-                        <a:srgbClr val="FAEEC6"/>
+                        <a:srgbClr val="D1FADC"/>
                       </a:solidFill>
                       <a:prstDash val="solid"/>
                     </a:lnB>
                     <a:solidFill>
-                      <a:srgbClr val="FAEEC6"/>
+                      <a:srgbClr val="D1FADC"/>
                     </a:solidFill>
                   </a:tcPr>
                 </a:tc>
@@ -5619,25 +5619,25 @@
                   <a:tcPr anchor="ctr" marL="73152" marR="73152">
                     <a:lnL w="9525" cap="flat" cmpd="sng" algn="ctr">
                       <a:solidFill>
-                        <a:srgbClr val="FAEEC6"/>
+                        <a:srgbClr val="D1FADC"/>
                       </a:solidFill>
                       <a:prstDash val="solid"/>
                     </a:lnL>
                     <a:lnR w="9525" cap="flat" cmpd="sng" algn="ctr">
                       <a:solidFill>
-                        <a:srgbClr val="FAEEC6"/>
+                        <a:srgbClr val="D1FADC"/>
                       </a:solidFill>
                       <a:prstDash val="solid"/>
                     </a:lnR>
                     <a:lnT w="9525" cap="flat" cmpd="sng" algn="ctr">
                       <a:solidFill>
-                        <a:srgbClr val="FAEEC6"/>
+                        <a:srgbClr val="D1FADC"/>
                       </a:solidFill>
                       <a:prstDash val="solid"/>
                     </a:lnT>
                     <a:lnB w="9525" cap="flat" cmpd="sng" algn="ctr">
                       <a:solidFill>
-                        <a:srgbClr val="FAEEC6"/>
+                        <a:srgbClr val="D1FADC"/>
                       </a:solidFill>
                       <a:prstDash val="solid"/>
                     </a:lnB>
@@ -5665,25 +5665,25 @@
                   <a:tcPr anchor="ctr" marL="73152" marR="73152">
                     <a:lnL w="9525" cap="flat" cmpd="sng" algn="ctr">
                       <a:solidFill>
-                        <a:srgbClr val="FAEEC6"/>
+                        <a:srgbClr val="D1FADC"/>
                       </a:solidFill>
                       <a:prstDash val="solid"/>
                     </a:lnL>
                     <a:lnR w="9525" cap="flat" cmpd="sng" algn="ctr">
                       <a:solidFill>
-                        <a:srgbClr val="FAEEC6"/>
+                        <a:srgbClr val="D1FADC"/>
                       </a:solidFill>
                       <a:prstDash val="solid"/>
                     </a:lnR>
                     <a:lnT w="9525" cap="flat" cmpd="sng" algn="ctr">
                       <a:solidFill>
-                        <a:srgbClr val="FAEEC6"/>
+                        <a:srgbClr val="D1FADC"/>
                       </a:solidFill>
                       <a:prstDash val="solid"/>
                     </a:lnT>
                     <a:lnB w="9525" cap="flat" cmpd="sng" algn="ctr">
                       <a:solidFill>
-                        <a:srgbClr val="FAEEC6"/>
+                        <a:srgbClr val="D1FADC"/>
                       </a:solidFill>
                       <a:prstDash val="solid"/>
                     </a:lnB>
@@ -5711,25 +5711,25 @@
                   <a:tcPr anchor="ctr" marL="73152" marR="73152">
                     <a:lnL w="9525" cap="flat" cmpd="sng" algn="ctr">
                       <a:solidFill>
-                        <a:srgbClr val="FAEEC6"/>
+                        <a:srgbClr val="D1FADC"/>
                       </a:solidFill>
                       <a:prstDash val="solid"/>
                     </a:lnL>
                     <a:lnR w="9525" cap="flat" cmpd="sng" algn="ctr">
                       <a:solidFill>
-                        <a:srgbClr val="FAEEC6"/>
+                        <a:srgbClr val="D1FADC"/>
                       </a:solidFill>
                       <a:prstDash val="solid"/>
                     </a:lnR>
                     <a:lnT w="9525" cap="flat" cmpd="sng" algn="ctr">
                       <a:solidFill>
-                        <a:srgbClr val="FAEEC6"/>
+                        <a:srgbClr val="D1FADC"/>
                       </a:solidFill>
                       <a:prstDash val="solid"/>
                     </a:lnT>
                     <a:lnB w="9525" cap="flat" cmpd="sng" algn="ctr">
                       <a:solidFill>
-                        <a:srgbClr val="FAEEC6"/>
+                        <a:srgbClr val="D1FADC"/>
                       </a:solidFill>
                       <a:prstDash val="solid"/>
                     </a:lnB>
@@ -5749,7 +5749,7 @@
                       <a:r>
                         <a:rPr sz="1500" b="1">
                           <a:solidFill>
-                            <a:srgbClr val="6E570C"/>
+                            <a:srgbClr val="115F25"/>
                           </a:solidFill>
                         </a:rPr>
                         <a:t>2</a:t>
@@ -5759,30 +5759,30 @@
                   <a:tcPr anchor="ctr" marL="73152" marR="73152">
                     <a:lnL w="9525" cap="flat" cmpd="sng" algn="ctr">
                       <a:solidFill>
-                        <a:srgbClr val="FAEEC6"/>
+                        <a:srgbClr val="D1FADC"/>
                       </a:solidFill>
                       <a:prstDash val="solid"/>
                     </a:lnL>
                     <a:lnR w="9525" cap="flat" cmpd="sng" algn="ctr">
                       <a:solidFill>
-                        <a:srgbClr val="FAEEC6"/>
+                        <a:srgbClr val="D1FADC"/>
                       </a:solidFill>
                       <a:prstDash val="solid"/>
                     </a:lnR>
                     <a:lnT w="9525" cap="flat" cmpd="sng" algn="ctr">
                       <a:solidFill>
-                        <a:srgbClr val="FAEEC6"/>
+                        <a:srgbClr val="D1FADC"/>
                       </a:solidFill>
                       <a:prstDash val="solid"/>
                     </a:lnT>
                     <a:lnB w="9525" cap="flat" cmpd="sng" algn="ctr">
                       <a:solidFill>
-                        <a:srgbClr val="FAEEC6"/>
+                        <a:srgbClr val="D1FADC"/>
                       </a:solidFill>
                       <a:prstDash val="solid"/>
                     </a:lnB>
                     <a:solidFill>
-                      <a:srgbClr val="FAEEC6"/>
+                      <a:srgbClr val="D1FADC"/>
                     </a:solidFill>
                   </a:tcPr>
                 </a:tc>
@@ -5805,30 +5805,30 @@
                   <a:tcPr anchor="ctr" marL="73152" marR="73152">
                     <a:lnL w="9525" cap="flat" cmpd="sng" algn="ctr">
                       <a:solidFill>
-                        <a:srgbClr val="FAEEC6"/>
+                        <a:srgbClr val="D1FADC"/>
                       </a:solidFill>
                       <a:prstDash val="solid"/>
                     </a:lnL>
                     <a:lnR w="9525" cap="flat" cmpd="sng" algn="ctr">
                       <a:solidFill>
-                        <a:srgbClr val="FAEEC6"/>
+                        <a:srgbClr val="D1FADC"/>
                       </a:solidFill>
                       <a:prstDash val="solid"/>
                     </a:lnR>
                     <a:lnT w="9525" cap="flat" cmpd="sng" algn="ctr">
                       <a:solidFill>
-                        <a:srgbClr val="FAEEC6"/>
+                        <a:srgbClr val="D1FADC"/>
                       </a:solidFill>
                       <a:prstDash val="solid"/>
                     </a:lnT>
                     <a:lnB w="9525" cap="flat" cmpd="sng" algn="ctr">
                       <a:solidFill>
-                        <a:srgbClr val="FAEEC6"/>
+                        <a:srgbClr val="D1FADC"/>
                       </a:solidFill>
                       <a:prstDash val="solid"/>
                     </a:lnB>
                     <a:solidFill>
-                      <a:srgbClr val="FDF9ED"/>
+                      <a:srgbClr val="EEFCF1"/>
                     </a:solidFill>
                   </a:tcPr>
                 </a:tc>
@@ -5851,30 +5851,30 @@
                   <a:tcPr anchor="ctr" marL="73152" marR="73152">
                     <a:lnL w="9525" cap="flat" cmpd="sng" algn="ctr">
                       <a:solidFill>
-                        <a:srgbClr val="FAEEC6"/>
+                        <a:srgbClr val="D1FADC"/>
                       </a:solidFill>
                       <a:prstDash val="solid"/>
                     </a:lnL>
                     <a:lnR w="9525" cap="flat" cmpd="sng" algn="ctr">
                       <a:solidFill>
-                        <a:srgbClr val="FAEEC6"/>
+                        <a:srgbClr val="D1FADC"/>
                       </a:solidFill>
                       <a:prstDash val="solid"/>
                     </a:lnR>
                     <a:lnT w="9525" cap="flat" cmpd="sng" algn="ctr">
                       <a:solidFill>
-                        <a:srgbClr val="FAEEC6"/>
+                        <a:srgbClr val="D1FADC"/>
                       </a:solidFill>
                       <a:prstDash val="solid"/>
                     </a:lnT>
                     <a:lnB w="9525" cap="flat" cmpd="sng" algn="ctr">
                       <a:solidFill>
-                        <a:srgbClr val="FAEEC6"/>
+                        <a:srgbClr val="D1FADC"/>
                       </a:solidFill>
                       <a:prstDash val="solid"/>
                     </a:lnB>
                     <a:solidFill>
-                      <a:srgbClr val="FDF9ED"/>
+                      <a:srgbClr val="EEFCF1"/>
                     </a:solidFill>
                   </a:tcPr>
                 </a:tc>
@@ -5897,30 +5897,30 @@
                   <a:tcPr anchor="ctr" marL="73152" marR="73152">
                     <a:lnL w="9525" cap="flat" cmpd="sng" algn="ctr">
                       <a:solidFill>
-                        <a:srgbClr val="FAEEC6"/>
+                        <a:srgbClr val="D1FADC"/>
                       </a:solidFill>
                       <a:prstDash val="solid"/>
                     </a:lnL>
                     <a:lnR w="9525" cap="flat" cmpd="sng" algn="ctr">
                       <a:solidFill>
-                        <a:srgbClr val="FAEEC6"/>
+                        <a:srgbClr val="D1FADC"/>
                       </a:solidFill>
                       <a:prstDash val="solid"/>
                     </a:lnR>
                     <a:lnT w="9525" cap="flat" cmpd="sng" algn="ctr">
                       <a:solidFill>
-                        <a:srgbClr val="FAEEC6"/>
+                        <a:srgbClr val="D1FADC"/>
                       </a:solidFill>
                       <a:prstDash val="solid"/>
                     </a:lnT>
                     <a:lnB w="9525" cap="flat" cmpd="sng" algn="ctr">
                       <a:solidFill>
-                        <a:srgbClr val="FAEEC6"/>
+                        <a:srgbClr val="D1FADC"/>
                       </a:solidFill>
                       <a:prstDash val="solid"/>
                     </a:lnB>
                     <a:solidFill>
-                      <a:srgbClr val="FDF9ED"/>
+                      <a:srgbClr val="EEFCF1"/>
                     </a:solidFill>
                   </a:tcPr>
                 </a:tc>
@@ -5935,7 +5935,7 @@
                       <a:r>
                         <a:rPr sz="1500" b="1">
                           <a:solidFill>
-                            <a:srgbClr val="6E570C"/>
+                            <a:srgbClr val="115F25"/>
                           </a:solidFill>
                         </a:rPr>
                         <a:t>3</a:t>
@@ -5945,30 +5945,30 @@
                   <a:tcPr anchor="ctr" marL="73152" marR="73152">
                     <a:lnL w="9525" cap="flat" cmpd="sng" algn="ctr">
                       <a:solidFill>
-                        <a:srgbClr val="FAEEC6"/>
+                        <a:srgbClr val="D1FADC"/>
                       </a:solidFill>
                       <a:prstDash val="solid"/>
                     </a:lnL>
                     <a:lnR w="9525" cap="flat" cmpd="sng" algn="ctr">
                       <a:solidFill>
-                        <a:srgbClr val="FAEEC6"/>
+                        <a:srgbClr val="D1FADC"/>
                       </a:solidFill>
                       <a:prstDash val="solid"/>
                     </a:lnR>
                     <a:lnT w="9525" cap="flat" cmpd="sng" algn="ctr">
                       <a:solidFill>
-                        <a:srgbClr val="FAEEC6"/>
+                        <a:srgbClr val="D1FADC"/>
                       </a:solidFill>
                       <a:prstDash val="solid"/>
                     </a:lnT>
                     <a:lnB w="9525" cap="flat" cmpd="sng" algn="ctr">
                       <a:solidFill>
-                        <a:srgbClr val="FAEEC6"/>
+                        <a:srgbClr val="D1FADC"/>
                       </a:solidFill>
                       <a:prstDash val="solid"/>
                     </a:lnB>
                     <a:solidFill>
-                      <a:srgbClr val="FAEEC6"/>
+                      <a:srgbClr val="D1FADC"/>
                     </a:solidFill>
                   </a:tcPr>
                 </a:tc>
@@ -5991,25 +5991,25 @@
                   <a:tcPr anchor="ctr" marL="73152" marR="73152">
                     <a:lnL w="9525" cap="flat" cmpd="sng" algn="ctr">
                       <a:solidFill>
-                        <a:srgbClr val="FAEEC6"/>
+                        <a:srgbClr val="D1FADC"/>
                       </a:solidFill>
                       <a:prstDash val="solid"/>
                     </a:lnL>
                     <a:lnR w="9525" cap="flat" cmpd="sng" algn="ctr">
                       <a:solidFill>
-                        <a:srgbClr val="FAEEC6"/>
+                        <a:srgbClr val="D1FADC"/>
                       </a:solidFill>
                       <a:prstDash val="solid"/>
                     </a:lnR>
                     <a:lnT w="9525" cap="flat" cmpd="sng" algn="ctr">
                       <a:solidFill>
-                        <a:srgbClr val="FAEEC6"/>
+                        <a:srgbClr val="D1FADC"/>
                       </a:solidFill>
                       <a:prstDash val="solid"/>
                     </a:lnT>
                     <a:lnB w="9525" cap="flat" cmpd="sng" algn="ctr">
                       <a:solidFill>
-                        <a:srgbClr val="FAEEC6"/>
+                        <a:srgbClr val="D1FADC"/>
                       </a:solidFill>
                       <a:prstDash val="solid"/>
                     </a:lnB>
@@ -6037,25 +6037,25 @@
                   <a:tcPr anchor="ctr" marL="73152" marR="73152">
                     <a:lnL w="9525" cap="flat" cmpd="sng" algn="ctr">
                       <a:solidFill>
-                        <a:srgbClr val="FAEEC6"/>
+                        <a:srgbClr val="D1FADC"/>
                       </a:solidFill>
                       <a:prstDash val="solid"/>
                     </a:lnL>
                     <a:lnR w="9525" cap="flat" cmpd="sng" algn="ctr">
                       <a:solidFill>
-                        <a:srgbClr val="FAEEC6"/>
+                        <a:srgbClr val="D1FADC"/>
                       </a:solidFill>
                       <a:prstDash val="solid"/>
                     </a:lnR>
                     <a:lnT w="9525" cap="flat" cmpd="sng" algn="ctr">
                       <a:solidFill>
-                        <a:srgbClr val="FAEEC6"/>
+                        <a:srgbClr val="D1FADC"/>
                       </a:solidFill>
                       <a:prstDash val="solid"/>
                     </a:lnT>
                     <a:lnB w="9525" cap="flat" cmpd="sng" algn="ctr">
                       <a:solidFill>
-                        <a:srgbClr val="FAEEC6"/>
+                        <a:srgbClr val="D1FADC"/>
                       </a:solidFill>
                       <a:prstDash val="solid"/>
                     </a:lnB>
@@ -6083,25 +6083,25 @@
                   <a:tcPr anchor="ctr" marL="73152" marR="73152">
                     <a:lnL w="9525" cap="flat" cmpd="sng" algn="ctr">
                       <a:solidFill>
-                        <a:srgbClr val="FAEEC6"/>
+                        <a:srgbClr val="D1FADC"/>
                       </a:solidFill>
                       <a:prstDash val="solid"/>
                     </a:lnL>
                     <a:lnR w="9525" cap="flat" cmpd="sng" algn="ctr">
                       <a:solidFill>
-                        <a:srgbClr val="FAEEC6"/>
+                        <a:srgbClr val="D1FADC"/>
                       </a:solidFill>
                       <a:prstDash val="solid"/>
                     </a:lnR>
                     <a:lnT w="9525" cap="flat" cmpd="sng" algn="ctr">
                       <a:solidFill>
-                        <a:srgbClr val="FAEEC6"/>
+                        <a:srgbClr val="D1FADC"/>
                       </a:solidFill>
                       <a:prstDash val="solid"/>
                     </a:lnT>
                     <a:lnB w="9525" cap="flat" cmpd="sng" algn="ctr">
                       <a:solidFill>
-                        <a:srgbClr val="FAEEC6"/>
+                        <a:srgbClr val="D1FADC"/>
                       </a:solidFill>
                       <a:prstDash val="solid"/>
                     </a:lnB>
@@ -6121,7 +6121,7 @@
                       <a:r>
                         <a:rPr sz="1500" b="1">
                           <a:solidFill>
-                            <a:srgbClr val="6E570C"/>
+                            <a:srgbClr val="115F25"/>
                           </a:solidFill>
                         </a:rPr>
                         <a:t>4</a:t>
@@ -6131,30 +6131,30 @@
                   <a:tcPr anchor="ctr" marL="73152" marR="73152">
                     <a:lnL w="9525" cap="flat" cmpd="sng" algn="ctr">
                       <a:solidFill>
-                        <a:srgbClr val="FAEEC6"/>
+                        <a:srgbClr val="D1FADC"/>
                       </a:solidFill>
                       <a:prstDash val="solid"/>
                     </a:lnL>
                     <a:lnR w="9525" cap="flat" cmpd="sng" algn="ctr">
                       <a:solidFill>
-                        <a:srgbClr val="FAEEC6"/>
+                        <a:srgbClr val="D1FADC"/>
                       </a:solidFill>
                       <a:prstDash val="solid"/>
                     </a:lnR>
                     <a:lnT w="9525" cap="flat" cmpd="sng" algn="ctr">
                       <a:solidFill>
-                        <a:srgbClr val="FAEEC6"/>
+                        <a:srgbClr val="D1FADC"/>
                       </a:solidFill>
                       <a:prstDash val="solid"/>
                     </a:lnT>
                     <a:lnB w="9525" cap="flat" cmpd="sng" algn="ctr">
                       <a:solidFill>
-                        <a:srgbClr val="FAEEC6"/>
+                        <a:srgbClr val="D1FADC"/>
                       </a:solidFill>
                       <a:prstDash val="solid"/>
                     </a:lnB>
                     <a:solidFill>
-                      <a:srgbClr val="FAEEC6"/>
+                      <a:srgbClr val="D1FADC"/>
                     </a:solidFill>
                   </a:tcPr>
                 </a:tc>
@@ -6177,30 +6177,30 @@
                   <a:tcPr anchor="ctr" marL="73152" marR="73152">
                     <a:lnL w="9525" cap="flat" cmpd="sng" algn="ctr">
                       <a:solidFill>
-                        <a:srgbClr val="FAEEC6"/>
+                        <a:srgbClr val="D1FADC"/>
                       </a:solidFill>
                       <a:prstDash val="solid"/>
                     </a:lnL>
                     <a:lnR w="9525" cap="flat" cmpd="sng" algn="ctr">
                       <a:solidFill>
-                        <a:srgbClr val="FAEEC6"/>
+                        <a:srgbClr val="D1FADC"/>
                       </a:solidFill>
                       <a:prstDash val="solid"/>
                     </a:lnR>
                     <a:lnT w="9525" cap="flat" cmpd="sng" algn="ctr">
                       <a:solidFill>
-                        <a:srgbClr val="FAEEC6"/>
+                        <a:srgbClr val="D1FADC"/>
                       </a:solidFill>
                       <a:prstDash val="solid"/>
                     </a:lnT>
                     <a:lnB w="9525" cap="flat" cmpd="sng" algn="ctr">
                       <a:solidFill>
-                        <a:srgbClr val="FAEEC6"/>
+                        <a:srgbClr val="D1FADC"/>
                       </a:solidFill>
                       <a:prstDash val="solid"/>
                     </a:lnB>
                     <a:solidFill>
-                      <a:srgbClr val="FDF9ED"/>
+                      <a:srgbClr val="EEFCF1"/>
                     </a:solidFill>
                   </a:tcPr>
                 </a:tc>
@@ -6223,30 +6223,30 @@
                   <a:tcPr anchor="ctr" marL="73152" marR="73152">
                     <a:lnL w="9525" cap="flat" cmpd="sng" algn="ctr">
                       <a:solidFill>
-                        <a:srgbClr val="FAEEC6"/>
+                        <a:srgbClr val="D1FADC"/>
                       </a:solidFill>
                       <a:prstDash val="solid"/>
                     </a:lnL>
                     <a:lnR w="9525" cap="flat" cmpd="sng" algn="ctr">
                       <a:solidFill>
-                        <a:srgbClr val="FAEEC6"/>
+                        <a:srgbClr val="D1FADC"/>
                       </a:solidFill>
                       <a:prstDash val="solid"/>
                     </a:lnR>
                     <a:lnT w="9525" cap="flat" cmpd="sng" algn="ctr">
                       <a:solidFill>
-                        <a:srgbClr val="FAEEC6"/>
+                        <a:srgbClr val="D1FADC"/>
                       </a:solidFill>
                       <a:prstDash val="solid"/>
                     </a:lnT>
                     <a:lnB w="9525" cap="flat" cmpd="sng" algn="ctr">
                       <a:solidFill>
-                        <a:srgbClr val="FAEEC6"/>
+                        <a:srgbClr val="D1FADC"/>
                       </a:solidFill>
                       <a:prstDash val="solid"/>
                     </a:lnB>
                     <a:solidFill>
-                      <a:srgbClr val="FDF9ED"/>
+                      <a:srgbClr val="EEFCF1"/>
                     </a:solidFill>
                   </a:tcPr>
                 </a:tc>
@@ -6269,30 +6269,30 @@
                   <a:tcPr anchor="ctr" marL="73152" marR="73152">
                     <a:lnL w="9525" cap="flat" cmpd="sng" algn="ctr">
                       <a:solidFill>
-                        <a:srgbClr val="FAEEC6"/>
+                        <a:srgbClr val="D1FADC"/>
                       </a:solidFill>
                       <a:prstDash val="solid"/>
                     </a:lnL>
                     <a:lnR w="9525" cap="flat" cmpd="sng" algn="ctr">
                       <a:solidFill>
-                        <a:srgbClr val="FAEEC6"/>
+                        <a:srgbClr val="D1FADC"/>
                       </a:solidFill>
                       <a:prstDash val="solid"/>
                     </a:lnR>
                     <a:lnT w="9525" cap="flat" cmpd="sng" algn="ctr">
                       <a:solidFill>
-                        <a:srgbClr val="FAEEC6"/>
+                        <a:srgbClr val="D1FADC"/>
                       </a:solidFill>
                       <a:prstDash val="solid"/>
                     </a:lnT>
                     <a:lnB w="9525" cap="flat" cmpd="sng" algn="ctr">
                       <a:solidFill>
-                        <a:srgbClr val="FAEEC6"/>
+                        <a:srgbClr val="D1FADC"/>
                       </a:solidFill>
                       <a:prstDash val="solid"/>
                     </a:lnB>
                     <a:solidFill>
-                      <a:srgbClr val="FDF9ED"/>
+                      <a:srgbClr val="EEFCF1"/>
                     </a:solidFill>
                   </a:tcPr>
                 </a:tc>
@@ -6307,7 +6307,7 @@
                       <a:r>
                         <a:rPr sz="1500" b="1">
                           <a:solidFill>
-                            <a:srgbClr val="6E570C"/>
+                            <a:srgbClr val="115F25"/>
                           </a:solidFill>
                         </a:rPr>
                         <a:t>5</a:t>
@@ -6317,30 +6317,30 @@
                   <a:tcPr anchor="ctr" marL="73152" marR="73152">
                     <a:lnL w="9525" cap="flat" cmpd="sng" algn="ctr">
                       <a:solidFill>
-                        <a:srgbClr val="FAEEC6"/>
+                        <a:srgbClr val="D1FADC"/>
                       </a:solidFill>
                       <a:prstDash val="solid"/>
                     </a:lnL>
                     <a:lnR w="9525" cap="flat" cmpd="sng" algn="ctr">
                       <a:solidFill>
-                        <a:srgbClr val="FAEEC6"/>
+                        <a:srgbClr val="D1FADC"/>
                       </a:solidFill>
                       <a:prstDash val="solid"/>
                     </a:lnR>
                     <a:lnT w="9525" cap="flat" cmpd="sng" algn="ctr">
                       <a:solidFill>
-                        <a:srgbClr val="FAEEC6"/>
+                        <a:srgbClr val="D1FADC"/>
                       </a:solidFill>
                       <a:prstDash val="solid"/>
                     </a:lnT>
                     <a:lnB w="9525" cap="flat" cmpd="sng" algn="ctr">
                       <a:solidFill>
-                        <a:srgbClr val="FAEEC6"/>
+                        <a:srgbClr val="D1FADC"/>
                       </a:solidFill>
                       <a:prstDash val="solid"/>
                     </a:lnB>
                     <a:solidFill>
-                      <a:srgbClr val="FAEEC6"/>
+                      <a:srgbClr val="D1FADC"/>
                     </a:solidFill>
                   </a:tcPr>
                 </a:tc>
@@ -6363,25 +6363,25 @@
                   <a:tcPr anchor="ctr" marL="73152" marR="73152">
                     <a:lnL w="9525" cap="flat" cmpd="sng" algn="ctr">
                       <a:solidFill>
-                        <a:srgbClr val="FAEEC6"/>
+                        <a:srgbClr val="D1FADC"/>
                       </a:solidFill>
                       <a:prstDash val="solid"/>
                     </a:lnL>
                     <a:lnR w="9525" cap="flat" cmpd="sng" algn="ctr">
                       <a:solidFill>
-                        <a:srgbClr val="FAEEC6"/>
+                        <a:srgbClr val="D1FADC"/>
                       </a:solidFill>
                       <a:prstDash val="solid"/>
                     </a:lnR>
                     <a:lnT w="9525" cap="flat" cmpd="sng" algn="ctr">
                       <a:solidFill>
-                        <a:srgbClr val="FAEEC6"/>
+                        <a:srgbClr val="D1FADC"/>
                       </a:solidFill>
                       <a:prstDash val="solid"/>
                     </a:lnT>
                     <a:lnB w="9525" cap="flat" cmpd="sng" algn="ctr">
                       <a:solidFill>
-                        <a:srgbClr val="FAEEC6"/>
+                        <a:srgbClr val="D1FADC"/>
                       </a:solidFill>
                       <a:prstDash val="solid"/>
                     </a:lnB>
@@ -6409,25 +6409,25 @@
                   <a:tcPr anchor="ctr" marL="73152" marR="73152">
                     <a:lnL w="9525" cap="flat" cmpd="sng" algn="ctr">
                       <a:solidFill>
-                        <a:srgbClr val="FAEEC6"/>
+                        <a:srgbClr val="D1FADC"/>
                       </a:solidFill>
                       <a:prstDash val="solid"/>
                     </a:lnL>
                     <a:lnR w="9525" cap="flat" cmpd="sng" algn="ctr">
                       <a:solidFill>
-                        <a:srgbClr val="FAEEC6"/>
+                        <a:srgbClr val="D1FADC"/>
                       </a:solidFill>
                       <a:prstDash val="solid"/>
                     </a:lnR>
                     <a:lnT w="9525" cap="flat" cmpd="sng" algn="ctr">
                       <a:solidFill>
-                        <a:srgbClr val="FAEEC6"/>
+                        <a:srgbClr val="D1FADC"/>
                       </a:solidFill>
                       <a:prstDash val="solid"/>
                     </a:lnT>
                     <a:lnB w="9525" cap="flat" cmpd="sng" algn="ctr">
                       <a:solidFill>
-                        <a:srgbClr val="FAEEC6"/>
+                        <a:srgbClr val="D1FADC"/>
                       </a:solidFill>
                       <a:prstDash val="solid"/>
                     </a:lnB>
@@ -6455,25 +6455,25 @@
                   <a:tcPr anchor="ctr" marL="73152" marR="73152">
                     <a:lnL w="9525" cap="flat" cmpd="sng" algn="ctr">
                       <a:solidFill>
-                        <a:srgbClr val="FAEEC6"/>
+                        <a:srgbClr val="D1FADC"/>
                       </a:solidFill>
                       <a:prstDash val="solid"/>
                     </a:lnL>
                     <a:lnR w="9525" cap="flat" cmpd="sng" algn="ctr">
                       <a:solidFill>
-                        <a:srgbClr val="FAEEC6"/>
+                        <a:srgbClr val="D1FADC"/>
                       </a:solidFill>
                       <a:prstDash val="solid"/>
                     </a:lnR>
                     <a:lnT w="9525" cap="flat" cmpd="sng" algn="ctr">
                       <a:solidFill>
-                        <a:srgbClr val="FAEEC6"/>
+                        <a:srgbClr val="D1FADC"/>
                       </a:solidFill>
                       <a:prstDash val="solid"/>
                     </a:lnT>
                     <a:lnB w="9525" cap="flat" cmpd="sng" algn="ctr">
                       <a:solidFill>
-                        <a:srgbClr val="FAEEC6"/>
+                        <a:srgbClr val="D1FADC"/>
                       </a:solidFill>
                       <a:prstDash val="solid"/>
                     </a:lnB>
@@ -6559,7 +6559,7 @@
             <a:r>
               <a:rPr sz="3600" b="1" i="0">
                 <a:solidFill>
-                  <a:srgbClr val="6E570C"/>
+                  <a:srgbClr val="115F25"/>
                 </a:solidFill>
               </a:rPr>
               <a:t>감사합니다</a:t>
@@ -6597,7 +6597,7 @@
             <a:r>
               <a:rPr sz="1700" b="0" i="1">
                 <a:solidFill>
-                  <a:srgbClr val="6E570C"/>
+                  <a:srgbClr val="115F25"/>
                 </a:solidFill>
               </a:rPr>
               <a:t>끝까지 들어 주셔서 고맙습니다</a:t>
@@ -6662,34 +6662,34 @@
         <a:sysClr val="window" lastClr="FFFFFF"/>
       </a:lt1>
       <a:dk2>
-        <a:srgbClr val="6E570C"/>
+        <a:srgbClr val="115F25"/>
       </a:dk2>
       <a:lt2>
-        <a:srgbClr val="FDF9ED"/>
+        <a:srgbClr val="EEFCF1"/>
       </a:lt2>
       <a:accent1>
-        <a:srgbClr val="CAA016"/>
+        <a:srgbClr val="26C54E"/>
       </a:accent1>
       <a:accent2>
-        <a:srgbClr val="3B7A91"/>
+        <a:srgbClr val="209DB6"/>
       </a:accent2>
       <a:accent3>
-        <a:srgbClr val="6E570C"/>
+        <a:srgbClr val="115F25"/>
       </a:accent3>
       <a:accent4>
-        <a:srgbClr val="FAEEC6"/>
+        <a:srgbClr val="D1FADC"/>
       </a:accent4>
       <a:accent5>
-        <a:srgbClr val="828D54"/>
+        <a:srgbClr val="23B182"/>
       </a:accent5>
       <a:accent6>
-        <a:srgbClr val="A89A6D"/>
+        <a:srgbClr val="709F7C"/>
       </a:accent6>
       <a:hlink>
-        <a:srgbClr val="CAA016"/>
+        <a:srgbClr val="26C54E"/>
       </a:hlink>
       <a:folHlink>
-        <a:srgbClr val="6E570C"/>
+        <a:srgbClr val="115F25"/>
       </a:folHlink>
     </a:clrScheme>
     <a:fontScheme name="Office">

--- a/public/fun/pack/pptx/talk/발표템플릿_17_교육·강의_해바라기담장.pptx
+++ b/public/fun/pack/pptx/talk/발표템플릿_17_교육·강의_해바라기담장.pptx
@@ -3286,6 +3286,14 @@
 <file path=ppt/slides/slide1.xml><?xml version="1.0" encoding="utf-8"?>
 <p:sld xmlns:a="http://schemas.openxmlformats.org/drawingml/2006/main" xmlns:p="http://schemas.openxmlformats.org/presentationml/2006/main" xmlns:r="http://schemas.openxmlformats.org/officeDocument/2006/relationships">
   <p:cSld>
+    <p:bg>
+      <p:bgPr>
+        <a:solidFill>
+          <a:srgbClr val="FDF8EA"/>
+        </a:solidFill>
+        <a:effectLst/>
+      </p:bgPr>
+    </p:bg>
     <p:spTree>
       <p:nvGrpSpPr>
         <p:cNvPr id="1" name=""/>
@@ -3293,30 +3301,102 @@
         <p:nvPr/>
       </p:nvGrpSpPr>
       <p:grpSpPr/>
-      <p:pic>
-        <p:nvPicPr>
-          <p:cNvPr id="3" name="표지 그림" descr="talk-17.jpg"/>
-          <p:cNvPicPr>
-            <a:picLocks noChangeAspect="1"/>
-          </p:cNvPicPr>
+      <p:sp>
+        <p:nvSpPr>
+          <p:cNvPr id="3" name="장식"/>
+          <p:cNvSpPr/>
           <p:nvPr/>
-        </p:nvPicPr>
-        <p:blipFill>
-          <a:blip r:embed="rId2"/>
-          <a:stretch>
-            <a:fillRect/>
-          </a:stretch>
-        </p:blipFill>
-        <p:spPr>
-          <a:xfrm>
-            <a:off x="0" y="0"/>
-            <a:ext cx="12191695" cy="6858000"/>
+        </p:nvSpPr>
+        <p:spPr>
+          <a:xfrm>
+            <a:off x="5684367" y="1097280"/>
+            <a:ext cx="822960" cy="822960"/>
+          </a:xfrm>
+          <a:prstGeom prst="ellipse">
+            <a:avLst/>
+          </a:prstGeom>
+          <a:solidFill>
+            <a:srgbClr val="EAD07B"/>
+          </a:solidFill>
+          <a:ln>
+            <a:noFill/>
+          </a:ln>
+        </p:spPr>
+        <p:txBody>
+          <a:bodyPr rtlCol="0" anchor="ctr"/>
+          <a:lstStyle/>
+          <a:p>
+            <a:pPr algn="ctr"/>
+          </a:p>
+        </p:txBody>
+      </p:sp>
+      <p:sp>
+        <p:nvSpPr>
+          <p:cNvPr id="4" name="장식"/>
+          <p:cNvSpPr/>
+          <p:nvPr/>
+        </p:nvSpPr>
+        <p:spPr>
+          <a:xfrm>
+            <a:off x="5547207" y="4663440"/>
+            <a:ext cx="1097280" cy="18288"/>
           </a:xfrm>
           <a:prstGeom prst="rect">
             <a:avLst/>
           </a:prstGeom>
-        </p:spPr>
-      </p:pic>
+          <a:solidFill>
+            <a:srgbClr val="26231F"/>
+          </a:solidFill>
+          <a:ln>
+            <a:noFill/>
+          </a:ln>
+        </p:spPr>
+        <p:txBody>
+          <a:bodyPr rtlCol="0" anchor="ctr"/>
+          <a:lstStyle/>
+          <a:p>
+            <a:pPr algn="ctr"/>
+          </a:p>
+        </p:txBody>
+      </p:sp>
+      <p:sp>
+        <p:nvSpPr>
+          <p:cNvPr id="5" name="라벨"/>
+          <p:cNvSpPr txBox="1"/>
+          <p:nvPr/>
+        </p:nvSpPr>
+        <p:spPr>
+          <a:xfrm>
+            <a:off x="1828754" y="1874520"/>
+            <a:ext cx="8534186" cy="274320"/>
+          </a:xfrm>
+          <a:prstGeom prst="rect">
+            <a:avLst/>
+          </a:prstGeom>
+          <a:noFill/>
+        </p:spPr>
+        <p:txBody>
+          <a:bodyPr wrap="square" lIns="54864" rIns="54864" tIns="27432" bIns="27432" anchor="t">
+            <a:noAutofit/>
+          </a:bodyPr>
+          <a:lstStyle/>
+          <a:p>
+            <a:pPr algn="ctr">
+              <a:lnSpc>
+                <a:spcPct val="115000"/>
+              </a:lnSpc>
+            </a:pPr>
+            <a:r>
+              <a:rPr sz="1000" b="1" i="0" spc="250">
+                <a:solidFill>
+                  <a:srgbClr val="26231F"/>
+                </a:solidFill>
+              </a:rPr>
+              <a:t>PRESENTATION</a:t>
+            </a:r>
+          </a:p>
+        </p:txBody>
+      </p:sp>
       <p:sp>
         <p:nvSpPr>
           <p:cNvPr id="2" name="Title 1"/>
@@ -3329,8 +3409,8 @@
         </p:nvSpPr>
         <p:spPr>
           <a:xfrm>
-            <a:off x="853418" y="2057400"/>
-            <a:ext cx="6095847" cy="1554480"/>
+            <a:off x="1828754" y="2331720"/>
+            <a:ext cx="8534186" cy="1188720"/>
           </a:xfrm>
         </p:spPr>
         <p:txBody>
@@ -3339,15 +3419,15 @@
           </a:bodyPr>
           <a:lstStyle/>
           <a:p>
-            <a:pPr algn="l">
+            <a:pPr algn="ctr">
               <a:lnSpc>
                 <a:spcPct val="105000"/>
               </a:lnSpc>
             </a:pPr>
             <a:r>
-              <a:rPr sz="3600" b="1" i="0">
+              <a:rPr sz="4000" b="1" i="0">
                 <a:solidFill>
-                  <a:srgbClr val="115F25"/>
+                  <a:srgbClr val="26231F"/>
                 </a:solidFill>
               </a:rPr>
               <a:t>발표 제목을 입력하세요</a:t>
@@ -3357,14 +3437,14 @@
       </p:sp>
       <p:sp>
         <p:nvSpPr>
-          <p:cNvPr id="4" name="한 줄 문구"/>
+          <p:cNvPr id="6" name="한 줄 문구"/>
           <p:cNvSpPr txBox="1"/>
           <p:nvPr/>
         </p:nvSpPr>
         <p:spPr>
           <a:xfrm>
-            <a:off x="853418" y="3749039"/>
-            <a:ext cx="6095847" cy="822960"/>
+            <a:off x="1828754" y="3611880"/>
+            <a:ext cx="8534186" cy="822960"/>
           </a:xfrm>
           <a:prstGeom prst="rect">
             <a:avLst/>
@@ -3377,15 +3457,15 @@
           </a:bodyPr>
           <a:lstStyle/>
           <a:p>
-            <a:pPr algn="l">
+            <a:pPr algn="ctr">
               <a:lnSpc>
                 <a:spcPct val="115000"/>
               </a:lnSpc>
             </a:pPr>
             <a:r>
-              <a:rPr sz="1700" b="0" i="1">
+              <a:rPr sz="1700" b="0" i="0">
                 <a:solidFill>
-                  <a:srgbClr val="115F25"/>
+                  <a:srgbClr val="26231F"/>
                 </a:solidFill>
               </a:rPr>
               <a:t>받아 적지 않아도 되게 자료를 드립니다</a:t>
@@ -3395,14 +3475,14 @@
       </p:sp>
       <p:sp>
         <p:nvSpPr>
-          <p:cNvPr id="5" name="안내 문구"/>
+          <p:cNvPr id="7" name="안내 문구"/>
           <p:cNvSpPr txBox="1"/>
           <p:nvPr/>
         </p:nvSpPr>
         <p:spPr>
           <a:xfrm>
-            <a:off x="853418" y="4617720"/>
-            <a:ext cx="6095847" cy="914400"/>
+            <a:off x="1828754" y="4480560"/>
+            <a:ext cx="8534186" cy="914400"/>
           </a:xfrm>
           <a:prstGeom prst="rect">
             <a:avLst/>
@@ -3415,7 +3495,7 @@
           </a:bodyPr>
           <a:lstStyle/>
           <a:p>
-            <a:pPr algn="l">
+            <a:pPr algn="ctr">
               <a:lnSpc>
                 <a:spcPct val="115000"/>
               </a:lnSpc>
@@ -3423,14 +3503,14 @@
             <a:r>
               <a:rPr sz="1400" b="0" i="0">
                 <a:solidFill>
-                  <a:srgbClr val="666666"/>
+                  <a:srgbClr val="26231F"/>
                 </a:solidFill>
               </a:rPr>
               <a:t>교육·강의 · 발표자 이름</a:t>
             </a:r>
           </a:p>
           <a:p>
-            <a:pPr algn="l">
+            <a:pPr algn="ctr">
               <a:lnSpc>
                 <a:spcPct val="115000"/>
               </a:lnSpc>
@@ -3438,10 +3518,10 @@
             <a:r>
               <a:rPr sz="1400" b="0" i="0">
                 <a:solidFill>
-                  <a:srgbClr val="666666"/>
+                  <a:srgbClr val="26231F"/>
                 </a:solidFill>
               </a:rPr>
-              <a:t>2027. 00. 00</a:t>
+              <a:t>날짜 입력</a:t>
             </a:r>
           </a:p>
         </p:txBody>
@@ -3460,7 +3540,7 @@
     <p:bg>
       <p:bgPr>
         <a:solidFill>
-          <a:srgbClr val="26C54E"/>
+          <a:srgbClr val="FFFFFF"/>
         </a:solidFill>
         <a:effectLst/>
       </p:bgPr>
@@ -3480,16 +3560,83 @@
         </p:nvSpPr>
         <p:spPr>
           <a:xfrm>
-            <a:off x="274320" y="274320"/>
-            <a:ext cx="11643055" cy="6309360"/>
+            <a:off x="640080" y="566928"/>
+            <a:ext cx="64008" cy="868680"/>
           </a:xfrm>
           <a:prstGeom prst="roundRect">
             <a:avLst>
-              <a:gd name="adj" fmla="val 3500"/>
+              <a:gd name="adj" fmla="val 50000"/>
             </a:avLst>
           </a:prstGeom>
           <a:solidFill>
-            <a:srgbClr val="FFFFFF"/>
+            <a:srgbClr val="EAD07B"/>
+          </a:solidFill>
+          <a:ln>
+            <a:noFill/>
+          </a:ln>
+        </p:spPr>
+        <p:txBody>
+          <a:bodyPr rtlCol="0" anchor="ctr"/>
+          <a:lstStyle/>
+          <a:p>
+            <a:pPr algn="ctr"/>
+          </a:p>
+        </p:txBody>
+      </p:sp>
+      <p:sp>
+        <p:nvSpPr>
+          <p:cNvPr id="4" name="상단 라벨"/>
+          <p:cNvSpPr txBox="1"/>
+          <p:nvPr/>
+        </p:nvSpPr>
+        <p:spPr>
+          <a:xfrm>
+            <a:off x="868680" y="274320"/>
+            <a:ext cx="5486400" cy="274320"/>
+          </a:xfrm>
+          <a:prstGeom prst="rect">
+            <a:avLst/>
+          </a:prstGeom>
+          <a:noFill/>
+        </p:spPr>
+        <p:txBody>
+          <a:bodyPr wrap="square" lIns="54864" rIns="54864" tIns="27432" bIns="27432" anchor="ctr">
+            <a:noAutofit/>
+          </a:bodyPr>
+          <a:lstStyle/>
+          <a:p>
+            <a:pPr algn="l">
+              <a:lnSpc>
+                <a:spcPct val="115000"/>
+              </a:lnSpc>
+            </a:pPr>
+            <a:r>
+              <a:rPr sz="900" b="1" i="0" spc="250">
+                <a:solidFill>
+                  <a:srgbClr val="8E8780"/>
+                </a:solidFill>
+              </a:rPr>
+              <a:t>PRESENTATION</a:t>
+            </a:r>
+          </a:p>
+        </p:txBody>
+      </p:sp>
+      <p:sp>
+        <p:nvSpPr>
+          <p:cNvPr id="5" name="포인트"/>
+          <p:cNvSpPr/>
+          <p:nvPr/>
+        </p:nvSpPr>
+        <p:spPr>
+          <a:xfrm rot="18900000">
+            <a:off x="11167567" y="667512"/>
+            <a:ext cx="310896" cy="310896"/>
+          </a:xfrm>
+          <a:prstGeom prst="teardrop">
+            <a:avLst/>
+          </a:prstGeom>
+          <a:solidFill>
+            <a:srgbClr val="F3E1A5"/>
           </a:solidFill>
           <a:ln>
             <a:noFill/>
@@ -3515,7 +3662,7 @@
         </p:nvSpPr>
         <p:spPr>
           <a:xfrm>
-            <a:off x="731520" y="548640"/>
+            <a:off x="868680" y="566928"/>
             <a:ext cx="9448495" cy="868680"/>
           </a:xfrm>
         </p:spPr>
@@ -3533,7 +3680,7 @@
             <a:r>
               <a:rPr sz="3000" b="1" i="0">
                 <a:solidFill>
-                  <a:srgbClr val="115F25"/>
+                  <a:srgbClr val="26231F"/>
                 </a:solidFill>
               </a:rPr>
               <a:t>목차</a:t>
@@ -3543,26 +3690,24 @@
       </p:sp>
       <p:sp>
         <p:nvSpPr>
-          <p:cNvPr id="4" name="줄 1"/>
+          <p:cNvPr id="6" name="줄 1"/>
           <p:cNvSpPr/>
           <p:nvPr/>
         </p:nvSpPr>
         <p:spPr>
           <a:xfrm>
-            <a:off x="731520" y="1600200"/>
-            <a:ext cx="10728655" cy="914400"/>
+            <a:off x="640080" y="1783080"/>
+            <a:ext cx="10911535" cy="914400"/>
           </a:xfrm>
           <a:prstGeom prst="roundRect">
             <a:avLst>
-              <a:gd name="adj" fmla="val 8000"/>
+              <a:gd name="adj" fmla="val 7000"/>
             </a:avLst>
           </a:prstGeom>
-          <a:solidFill>
-            <a:srgbClr val="EEFCF1"/>
-          </a:solidFill>
-          <a:ln w="12700">
+          <a:noFill/>
+          <a:ln w="15875">
             <a:solidFill>
-              <a:srgbClr val="D1FADC"/>
+              <a:srgbClr val="EAD07B"/>
             </a:solidFill>
           </a:ln>
         </p:spPr>
@@ -3576,23 +3721,23 @@
       </p:sp>
       <p:sp>
         <p:nvSpPr>
-          <p:cNvPr id="5" name="번호 1"/>
+          <p:cNvPr id="7" name="번호 1"/>
           <p:cNvSpPr/>
           <p:nvPr/>
         </p:nvSpPr>
         <p:spPr>
           <a:xfrm>
-            <a:off x="914400" y="1828800"/>
+            <a:off x="822959" y="2011680"/>
             <a:ext cx="457200" cy="457200"/>
           </a:xfrm>
           <a:prstGeom prst="ellipse">
             <a:avLst/>
           </a:prstGeom>
-          <a:solidFill>
-            <a:srgbClr val="26C54E"/>
-          </a:solidFill>
-          <a:ln>
-            <a:noFill/>
+          <a:noFill/>
+          <a:ln w="19050">
+            <a:solidFill>
+              <a:srgbClr val="EAD07B"/>
+            </a:solidFill>
           </a:ln>
         </p:spPr>
         <p:txBody>
@@ -3609,7 +3754,7 @@
             <a:r>
               <a:rPr sz="1600" b="1" i="0">
                 <a:solidFill>
-                  <a:srgbClr val="FFFFFF"/>
+                  <a:srgbClr val="494127"/>
                 </a:solidFill>
               </a:rPr>
               <a:t>1</a:t>
@@ -3619,13 +3764,13 @@
       </p:sp>
       <p:sp>
         <p:nvSpPr>
-          <p:cNvPr id="6" name="TextBox 5"/>
+          <p:cNvPr id="8" name="TextBox 7"/>
           <p:cNvSpPr txBox="1"/>
           <p:nvPr/>
         </p:nvSpPr>
         <p:spPr>
           <a:xfrm>
-            <a:off x="1600200" y="1645920"/>
+            <a:off x="1508760" y="1828800"/>
             <a:ext cx="2743200" cy="822960"/>
           </a:xfrm>
           <a:prstGeom prst="rect">
@@ -3647,7 +3792,7 @@
             <a:r>
               <a:rPr sz="1800" b="1" i="0">
                 <a:solidFill>
-                  <a:srgbClr val="115F25"/>
+                  <a:srgbClr val="494127"/>
                 </a:solidFill>
               </a:rPr>
               <a:t>오늘의 목표</a:t>
@@ -3657,14 +3802,14 @@
       </p:sp>
       <p:sp>
         <p:nvSpPr>
-          <p:cNvPr id="7" name="TextBox 6"/>
+          <p:cNvPr id="9" name="TextBox 8"/>
           <p:cNvSpPr txBox="1"/>
           <p:nvPr/>
         </p:nvSpPr>
         <p:spPr>
           <a:xfrm>
-            <a:off x="4389120" y="1645920"/>
-            <a:ext cx="6888175" cy="822960"/>
+            <a:off x="4297680" y="1828800"/>
+            <a:ext cx="7071055" cy="822960"/>
           </a:xfrm>
           <a:prstGeom prst="rect">
             <a:avLst/>
@@ -3685,7 +3830,7 @@
             <a:r>
               <a:rPr sz="1500" b="0" i="0">
                 <a:solidFill>
-                  <a:srgbClr val="2B2B2B"/>
+                  <a:srgbClr val="26231F"/>
                 </a:solidFill>
               </a:rPr>
               <a:t>한 줄로 내용을 적어 주세요</a:t>
@@ -3695,26 +3840,24 @@
       </p:sp>
       <p:sp>
         <p:nvSpPr>
-          <p:cNvPr id="8" name="줄 2"/>
+          <p:cNvPr id="10" name="줄 2"/>
           <p:cNvSpPr/>
           <p:nvPr/>
         </p:nvSpPr>
         <p:spPr>
           <a:xfrm>
-            <a:off x="731520" y="2651760"/>
-            <a:ext cx="10728655" cy="914400"/>
+            <a:off x="640080" y="2834639"/>
+            <a:ext cx="10911535" cy="914400"/>
           </a:xfrm>
           <a:prstGeom prst="roundRect">
             <a:avLst>
-              <a:gd name="adj" fmla="val 8000"/>
+              <a:gd name="adj" fmla="val 7000"/>
             </a:avLst>
           </a:prstGeom>
-          <a:solidFill>
-            <a:srgbClr val="EEFCF1"/>
-          </a:solidFill>
-          <a:ln w="12700">
+          <a:noFill/>
+          <a:ln w="15875">
             <a:solidFill>
-              <a:srgbClr val="D1FADC"/>
+              <a:srgbClr val="EAD07B"/>
             </a:solidFill>
           </a:ln>
         </p:spPr>
@@ -3728,23 +3871,23 @@
       </p:sp>
       <p:sp>
         <p:nvSpPr>
-          <p:cNvPr id="9" name="번호 2"/>
+          <p:cNvPr id="11" name="번호 2"/>
           <p:cNvSpPr/>
           <p:nvPr/>
         </p:nvSpPr>
         <p:spPr>
           <a:xfrm>
-            <a:off x="914400" y="2880360"/>
+            <a:off x="822959" y="3063239"/>
             <a:ext cx="457200" cy="457200"/>
           </a:xfrm>
           <a:prstGeom prst="ellipse">
             <a:avLst/>
           </a:prstGeom>
-          <a:solidFill>
-            <a:srgbClr val="26C54E"/>
-          </a:solidFill>
-          <a:ln>
-            <a:noFill/>
+          <a:noFill/>
+          <a:ln w="19050">
+            <a:solidFill>
+              <a:srgbClr val="EAD07B"/>
+            </a:solidFill>
           </a:ln>
         </p:spPr>
         <p:txBody>
@@ -3761,7 +3904,7 @@
             <a:r>
               <a:rPr sz="1600" b="1" i="0">
                 <a:solidFill>
-                  <a:srgbClr val="FFFFFF"/>
+                  <a:srgbClr val="494127"/>
                 </a:solidFill>
               </a:rPr>
               <a:t>2</a:t>
@@ -3771,13 +3914,13 @@
       </p:sp>
       <p:sp>
         <p:nvSpPr>
-          <p:cNvPr id="10" name="TextBox 9"/>
+          <p:cNvPr id="12" name="TextBox 11"/>
           <p:cNvSpPr txBox="1"/>
           <p:nvPr/>
         </p:nvSpPr>
         <p:spPr>
           <a:xfrm>
-            <a:off x="1600200" y="2697479"/>
+            <a:off x="1508760" y="2880359"/>
             <a:ext cx="2743200" cy="822960"/>
           </a:xfrm>
           <a:prstGeom prst="rect">
@@ -3799,7 +3942,7 @@
             <a:r>
               <a:rPr sz="1800" b="1" i="0">
                 <a:solidFill>
-                  <a:srgbClr val="115F25"/>
+                  <a:srgbClr val="494127"/>
                 </a:solidFill>
               </a:rPr>
               <a:t>핵심 개념</a:t>
@@ -3809,14 +3952,14 @@
       </p:sp>
       <p:sp>
         <p:nvSpPr>
-          <p:cNvPr id="11" name="TextBox 10"/>
+          <p:cNvPr id="13" name="TextBox 12"/>
           <p:cNvSpPr txBox="1"/>
           <p:nvPr/>
         </p:nvSpPr>
         <p:spPr>
           <a:xfrm>
-            <a:off x="4389120" y="2697479"/>
-            <a:ext cx="6888175" cy="822960"/>
+            <a:off x="4297680" y="2880359"/>
+            <a:ext cx="7071055" cy="822960"/>
           </a:xfrm>
           <a:prstGeom prst="rect">
             <a:avLst/>
@@ -3837,7 +3980,7 @@
             <a:r>
               <a:rPr sz="1500" b="0" i="0">
                 <a:solidFill>
-                  <a:srgbClr val="2B2B2B"/>
+                  <a:srgbClr val="26231F"/>
                 </a:solidFill>
               </a:rPr>
               <a:t>한 줄로 내용을 적어 주세요</a:t>
@@ -3847,26 +3990,24 @@
       </p:sp>
       <p:sp>
         <p:nvSpPr>
-          <p:cNvPr id="12" name="줄 3"/>
+          <p:cNvPr id="14" name="줄 3"/>
           <p:cNvSpPr/>
           <p:nvPr/>
         </p:nvSpPr>
         <p:spPr>
           <a:xfrm>
-            <a:off x="731520" y="3703320"/>
-            <a:ext cx="10728655" cy="914400"/>
+            <a:off x="640080" y="3886200"/>
+            <a:ext cx="10911535" cy="914400"/>
           </a:xfrm>
           <a:prstGeom prst="roundRect">
             <a:avLst>
-              <a:gd name="adj" fmla="val 8000"/>
+              <a:gd name="adj" fmla="val 7000"/>
             </a:avLst>
           </a:prstGeom>
-          <a:solidFill>
-            <a:srgbClr val="EEFCF1"/>
-          </a:solidFill>
-          <a:ln w="12700">
+          <a:noFill/>
+          <a:ln w="15875">
             <a:solidFill>
-              <a:srgbClr val="D1FADC"/>
+              <a:srgbClr val="EAD07B"/>
             </a:solidFill>
           </a:ln>
         </p:spPr>
@@ -3880,23 +4021,23 @@
       </p:sp>
       <p:sp>
         <p:nvSpPr>
-          <p:cNvPr id="13" name="번호 3"/>
+          <p:cNvPr id="15" name="번호 3"/>
           <p:cNvSpPr/>
           <p:nvPr/>
         </p:nvSpPr>
         <p:spPr>
           <a:xfrm>
-            <a:off x="914400" y="3931920"/>
+            <a:off x="822959" y="4114800"/>
             <a:ext cx="457200" cy="457200"/>
           </a:xfrm>
           <a:prstGeom prst="ellipse">
             <a:avLst/>
           </a:prstGeom>
-          <a:solidFill>
-            <a:srgbClr val="26C54E"/>
-          </a:solidFill>
-          <a:ln>
-            <a:noFill/>
+          <a:noFill/>
+          <a:ln w="19050">
+            <a:solidFill>
+              <a:srgbClr val="EAD07B"/>
+            </a:solidFill>
           </a:ln>
         </p:spPr>
         <p:txBody>
@@ -3913,7 +4054,7 @@
             <a:r>
               <a:rPr sz="1600" b="1" i="0">
                 <a:solidFill>
-                  <a:srgbClr val="FFFFFF"/>
+                  <a:srgbClr val="494127"/>
                 </a:solidFill>
               </a:rPr>
               <a:t>3</a:t>
@@ -3923,13 +4064,13 @@
       </p:sp>
       <p:sp>
         <p:nvSpPr>
-          <p:cNvPr id="14" name="TextBox 13"/>
+          <p:cNvPr id="16" name="TextBox 15"/>
           <p:cNvSpPr txBox="1"/>
           <p:nvPr/>
         </p:nvSpPr>
         <p:spPr>
           <a:xfrm>
-            <a:off x="1600200" y="3749039"/>
+            <a:off x="1508760" y="3931920"/>
             <a:ext cx="2743200" cy="822960"/>
           </a:xfrm>
           <a:prstGeom prst="rect">
@@ -3951,7 +4092,7 @@
             <a:r>
               <a:rPr sz="1800" b="1" i="0">
                 <a:solidFill>
-                  <a:srgbClr val="115F25"/>
+                  <a:srgbClr val="494127"/>
                 </a:solidFill>
               </a:rPr>
               <a:t>실습과 예시</a:t>
@@ -3961,14 +4102,14 @@
       </p:sp>
       <p:sp>
         <p:nvSpPr>
-          <p:cNvPr id="15" name="TextBox 14"/>
+          <p:cNvPr id="17" name="TextBox 16"/>
           <p:cNvSpPr txBox="1"/>
           <p:nvPr/>
         </p:nvSpPr>
         <p:spPr>
           <a:xfrm>
-            <a:off x="4389120" y="3749039"/>
-            <a:ext cx="6888175" cy="822960"/>
+            <a:off x="4297680" y="3931920"/>
+            <a:ext cx="7071055" cy="822960"/>
           </a:xfrm>
           <a:prstGeom prst="rect">
             <a:avLst/>
@@ -3989,7 +4130,7 @@
             <a:r>
               <a:rPr sz="1500" b="0" i="0">
                 <a:solidFill>
-                  <a:srgbClr val="2B2B2B"/>
+                  <a:srgbClr val="26231F"/>
                 </a:solidFill>
               </a:rPr>
               <a:t>한 줄로 내용을 적어 주세요</a:t>
@@ -3999,26 +4140,24 @@
       </p:sp>
       <p:sp>
         <p:nvSpPr>
-          <p:cNvPr id="16" name="줄 4"/>
+          <p:cNvPr id="18" name="줄 4"/>
           <p:cNvSpPr/>
           <p:nvPr/>
         </p:nvSpPr>
         <p:spPr>
           <a:xfrm>
-            <a:off x="731520" y="4754879"/>
-            <a:ext cx="10728655" cy="914400"/>
+            <a:off x="640080" y="4937759"/>
+            <a:ext cx="10911535" cy="914400"/>
           </a:xfrm>
           <a:prstGeom prst="roundRect">
             <a:avLst>
-              <a:gd name="adj" fmla="val 8000"/>
+              <a:gd name="adj" fmla="val 7000"/>
             </a:avLst>
           </a:prstGeom>
-          <a:solidFill>
-            <a:srgbClr val="EEFCF1"/>
-          </a:solidFill>
-          <a:ln w="12700">
+          <a:noFill/>
+          <a:ln w="15875">
             <a:solidFill>
-              <a:srgbClr val="D1FADC"/>
+              <a:srgbClr val="EAD07B"/>
             </a:solidFill>
           </a:ln>
         </p:spPr>
@@ -4032,23 +4171,23 @@
       </p:sp>
       <p:sp>
         <p:nvSpPr>
-          <p:cNvPr id="17" name="번호 4"/>
+          <p:cNvPr id="19" name="번호 4"/>
           <p:cNvSpPr/>
           <p:nvPr/>
         </p:nvSpPr>
         <p:spPr>
           <a:xfrm>
-            <a:off x="914400" y="4983479"/>
+            <a:off x="822959" y="5166359"/>
             <a:ext cx="457200" cy="457200"/>
           </a:xfrm>
           <a:prstGeom prst="ellipse">
             <a:avLst/>
           </a:prstGeom>
-          <a:solidFill>
-            <a:srgbClr val="26C54E"/>
-          </a:solidFill>
-          <a:ln>
-            <a:noFill/>
+          <a:noFill/>
+          <a:ln w="19050">
+            <a:solidFill>
+              <a:srgbClr val="EAD07B"/>
+            </a:solidFill>
           </a:ln>
         </p:spPr>
         <p:txBody>
@@ -4065,7 +4204,7 @@
             <a:r>
               <a:rPr sz="1600" b="1" i="0">
                 <a:solidFill>
-                  <a:srgbClr val="FFFFFF"/>
+                  <a:srgbClr val="494127"/>
                 </a:solidFill>
               </a:rPr>
               <a:t>4</a:t>
@@ -4075,13 +4214,13 @@
       </p:sp>
       <p:sp>
         <p:nvSpPr>
-          <p:cNvPr id="18" name="TextBox 17"/>
+          <p:cNvPr id="20" name="TextBox 19"/>
           <p:cNvSpPr txBox="1"/>
           <p:nvPr/>
         </p:nvSpPr>
         <p:spPr>
           <a:xfrm>
-            <a:off x="1600200" y="4800599"/>
+            <a:off x="1508760" y="4983479"/>
             <a:ext cx="2743200" cy="822960"/>
           </a:xfrm>
           <a:prstGeom prst="rect">
@@ -4103,7 +4242,7 @@
             <a:r>
               <a:rPr sz="1800" b="1" i="0">
                 <a:solidFill>
-                  <a:srgbClr val="115F25"/>
+                  <a:srgbClr val="494127"/>
                 </a:solidFill>
               </a:rPr>
               <a:t>정리와 질문</a:t>
@@ -4113,14 +4252,14 @@
       </p:sp>
       <p:sp>
         <p:nvSpPr>
-          <p:cNvPr id="19" name="TextBox 18"/>
+          <p:cNvPr id="21" name="TextBox 20"/>
           <p:cNvSpPr txBox="1"/>
           <p:nvPr/>
         </p:nvSpPr>
         <p:spPr>
           <a:xfrm>
-            <a:off x="4389120" y="4800599"/>
-            <a:ext cx="6888175" cy="822960"/>
+            <a:off x="4297680" y="4983479"/>
+            <a:ext cx="7071055" cy="822960"/>
           </a:xfrm>
           <a:prstGeom prst="rect">
             <a:avLst/>
@@ -4141,7 +4280,7 @@
             <a:r>
               <a:rPr sz="1500" b="0" i="0">
                 <a:solidFill>
-                  <a:srgbClr val="2B2B2B"/>
+                  <a:srgbClr val="26231F"/>
                 </a:solidFill>
               </a:rPr>
               <a:t>한 줄로 내용을 적어 주세요</a:t>
@@ -4163,7 +4302,7 @@
     <p:bg>
       <p:bgPr>
         <a:solidFill>
-          <a:srgbClr val="26C54E"/>
+          <a:srgbClr val="FFFFFF"/>
         </a:solidFill>
         <a:effectLst/>
       </p:bgPr>
@@ -4183,16 +4322,83 @@
         </p:nvSpPr>
         <p:spPr>
           <a:xfrm>
-            <a:off x="274320" y="274320"/>
-            <a:ext cx="11643055" cy="6309360"/>
+            <a:off x="640080" y="566928"/>
+            <a:ext cx="64008" cy="868680"/>
           </a:xfrm>
           <a:prstGeom prst="roundRect">
             <a:avLst>
-              <a:gd name="adj" fmla="val 3500"/>
+              <a:gd name="adj" fmla="val 50000"/>
             </a:avLst>
           </a:prstGeom>
           <a:solidFill>
-            <a:srgbClr val="FFFFFF"/>
+            <a:srgbClr val="EAD07B"/>
+          </a:solidFill>
+          <a:ln>
+            <a:noFill/>
+          </a:ln>
+        </p:spPr>
+        <p:txBody>
+          <a:bodyPr rtlCol="0" anchor="ctr"/>
+          <a:lstStyle/>
+          <a:p>
+            <a:pPr algn="ctr"/>
+          </a:p>
+        </p:txBody>
+      </p:sp>
+      <p:sp>
+        <p:nvSpPr>
+          <p:cNvPr id="4" name="상단 라벨"/>
+          <p:cNvSpPr txBox="1"/>
+          <p:nvPr/>
+        </p:nvSpPr>
+        <p:spPr>
+          <a:xfrm>
+            <a:off x="868680" y="274320"/>
+            <a:ext cx="5486400" cy="274320"/>
+          </a:xfrm>
+          <a:prstGeom prst="rect">
+            <a:avLst/>
+          </a:prstGeom>
+          <a:noFill/>
+        </p:spPr>
+        <p:txBody>
+          <a:bodyPr wrap="square" lIns="54864" rIns="54864" tIns="27432" bIns="27432" anchor="ctr">
+            <a:noAutofit/>
+          </a:bodyPr>
+          <a:lstStyle/>
+          <a:p>
+            <a:pPr algn="l">
+              <a:lnSpc>
+                <a:spcPct val="115000"/>
+              </a:lnSpc>
+            </a:pPr>
+            <a:r>
+              <a:rPr sz="900" b="1" i="0" spc="250">
+                <a:solidFill>
+                  <a:srgbClr val="8E8780"/>
+                </a:solidFill>
+              </a:rPr>
+              <a:t>PRESENTATION</a:t>
+            </a:r>
+          </a:p>
+        </p:txBody>
+      </p:sp>
+      <p:sp>
+        <p:nvSpPr>
+          <p:cNvPr id="5" name="포인트"/>
+          <p:cNvSpPr/>
+          <p:nvPr/>
+        </p:nvSpPr>
+        <p:spPr>
+          <a:xfrm rot="18900000">
+            <a:off x="11167567" y="667512"/>
+            <a:ext cx="310896" cy="310896"/>
+          </a:xfrm>
+          <a:prstGeom prst="teardrop">
+            <a:avLst/>
+          </a:prstGeom>
+          <a:solidFill>
+            <a:srgbClr val="F3E1A5"/>
           </a:solidFill>
           <a:ln>
             <a:noFill/>
@@ -4218,7 +4424,7 @@
         </p:nvSpPr>
         <p:spPr>
           <a:xfrm>
-            <a:off x="731520" y="548640"/>
+            <a:off x="868680" y="566928"/>
             <a:ext cx="9448495" cy="868680"/>
           </a:xfrm>
         </p:spPr>
@@ -4236,7 +4442,7 @@
             <a:r>
               <a:rPr sz="3000" b="1" i="0">
                 <a:solidFill>
-                  <a:srgbClr val="115F25"/>
+                  <a:srgbClr val="26231F"/>
                 </a:solidFill>
               </a:rPr>
               <a:t>핵심 메시지</a:t>
@@ -4246,14 +4452,14 @@
       </p:sp>
       <p:sp>
         <p:nvSpPr>
-          <p:cNvPr id="4" name="핵심 문장"/>
+          <p:cNvPr id="6" name="핵심 문장"/>
           <p:cNvSpPr txBox="1"/>
           <p:nvPr/>
         </p:nvSpPr>
         <p:spPr>
           <a:xfrm>
-            <a:off x="731520" y="1600200"/>
-            <a:ext cx="10728655" cy="1188720"/>
+            <a:off x="640080" y="1783080"/>
+            <a:ext cx="10911535" cy="1188720"/>
           </a:xfrm>
           <a:prstGeom prst="rect">
             <a:avLst/>
@@ -4274,7 +4480,7 @@
             <a:r>
               <a:rPr sz="2600" b="1" i="0">
                 <a:solidFill>
-                  <a:srgbClr val="115F25"/>
+                  <a:srgbClr val="494127"/>
                 </a:solidFill>
               </a:rPr>
               <a:t>한 문장으로 말하면 — 여기에 핵심 메시지를 입력하세요</a:t>
@@ -4284,26 +4490,24 @@
       </p:sp>
       <p:sp>
         <p:nvSpPr>
-          <p:cNvPr id="5" name="카드 1"/>
+          <p:cNvPr id="7" name="카드 1"/>
           <p:cNvSpPr/>
           <p:nvPr/>
         </p:nvSpPr>
         <p:spPr>
           <a:xfrm>
-            <a:off x="731520" y="3063240"/>
-            <a:ext cx="3423818" cy="3017520"/>
+            <a:off x="640080" y="3246120"/>
+            <a:ext cx="3484778" cy="3017520"/>
           </a:xfrm>
           <a:prstGeom prst="roundRect">
             <a:avLst>
-              <a:gd name="adj" fmla="val 8000"/>
+              <a:gd name="adj" fmla="val 7000"/>
             </a:avLst>
           </a:prstGeom>
-          <a:solidFill>
-            <a:srgbClr val="EEFCF1"/>
-          </a:solidFill>
+          <a:noFill/>
           <a:ln w="15875">
             <a:solidFill>
-              <a:srgbClr val="D1FADC"/>
+              <a:srgbClr val="EAD07B"/>
             </a:solidFill>
           </a:ln>
         </p:spPr>
@@ -4317,23 +4521,23 @@
       </p:sp>
       <p:sp>
         <p:nvSpPr>
-          <p:cNvPr id="6" name="번호 1"/>
+          <p:cNvPr id="8" name="번호 1"/>
           <p:cNvSpPr/>
           <p:nvPr/>
         </p:nvSpPr>
         <p:spPr>
           <a:xfrm>
-            <a:off x="914400" y="3246120"/>
+            <a:off x="822959" y="3429000"/>
             <a:ext cx="457200" cy="457200"/>
           </a:xfrm>
           <a:prstGeom prst="ellipse">
             <a:avLst/>
           </a:prstGeom>
-          <a:solidFill>
-            <a:srgbClr val="26C54E"/>
-          </a:solidFill>
-          <a:ln>
-            <a:noFill/>
+          <a:noFill/>
+          <a:ln w="19050">
+            <a:solidFill>
+              <a:srgbClr val="EAD07B"/>
+            </a:solidFill>
           </a:ln>
         </p:spPr>
         <p:txBody>
@@ -4350,7 +4554,7 @@
             <a:r>
               <a:rPr sz="1600" b="1" i="0">
                 <a:solidFill>
-                  <a:srgbClr val="FFFFFF"/>
+                  <a:srgbClr val="494127"/>
                 </a:solidFill>
               </a:rPr>
               <a:t>1</a:t>
@@ -4360,14 +4564,14 @@
       </p:sp>
       <p:sp>
         <p:nvSpPr>
-          <p:cNvPr id="7" name="TextBox 6"/>
+          <p:cNvPr id="9" name="TextBox 8"/>
           <p:cNvSpPr txBox="1"/>
           <p:nvPr/>
         </p:nvSpPr>
         <p:spPr>
           <a:xfrm>
-            <a:off x="868680" y="3840480"/>
-            <a:ext cx="3149498" cy="640080"/>
+            <a:off x="777240" y="4023360"/>
+            <a:ext cx="3210458" cy="640080"/>
           </a:xfrm>
           <a:prstGeom prst="rect">
             <a:avLst/>
@@ -4388,7 +4592,7 @@
             <a:r>
               <a:rPr sz="1800" b="1" i="0">
                 <a:solidFill>
-                  <a:srgbClr val="115F25"/>
+                  <a:srgbClr val="494127"/>
                 </a:solidFill>
               </a:rPr>
               <a:t>알아야 할 것</a:t>
@@ -4398,14 +4602,14 @@
       </p:sp>
       <p:sp>
         <p:nvSpPr>
-          <p:cNvPr id="8" name="TextBox 7"/>
+          <p:cNvPr id="10" name="TextBox 9"/>
           <p:cNvSpPr txBox="1"/>
           <p:nvPr/>
         </p:nvSpPr>
         <p:spPr>
           <a:xfrm>
-            <a:off x="868680" y="4526280"/>
-            <a:ext cx="3149498" cy="1417319"/>
+            <a:off x="777240" y="4709160"/>
+            <a:ext cx="3210458" cy="1417319"/>
           </a:xfrm>
           <a:prstGeom prst="rect">
             <a:avLst/>
@@ -4426,7 +4630,7 @@
             <a:r>
               <a:rPr sz="1600" b="0" i="0">
                 <a:solidFill>
-                  <a:srgbClr val="2B2B2B"/>
+                  <a:srgbClr val="26231F"/>
                 </a:solidFill>
               </a:rPr>
               <a:t>내용을 입력하세요</a:t>
@@ -4441,7 +4645,7 @@
             <a:r>
               <a:rPr sz="1600" b="0" i="0">
                 <a:solidFill>
-                  <a:srgbClr val="2B2B2B"/>
+                  <a:srgbClr val="26231F"/>
                 </a:solidFill>
               </a:rPr>
               <a:t>내용을 입력하세요</a:t>
@@ -4451,26 +4655,24 @@
       </p:sp>
       <p:sp>
         <p:nvSpPr>
-          <p:cNvPr id="9" name="카드 2"/>
+          <p:cNvPr id="11" name="카드 2"/>
           <p:cNvSpPr/>
           <p:nvPr/>
         </p:nvSpPr>
         <p:spPr>
           <a:xfrm>
-            <a:off x="4383938" y="3063240"/>
-            <a:ext cx="3423818" cy="3017520"/>
+            <a:off x="4353458" y="3246120"/>
+            <a:ext cx="3484778" cy="3017520"/>
           </a:xfrm>
           <a:prstGeom prst="roundRect">
             <a:avLst>
-              <a:gd name="adj" fmla="val 8000"/>
+              <a:gd name="adj" fmla="val 7000"/>
             </a:avLst>
           </a:prstGeom>
-          <a:solidFill>
-            <a:srgbClr val="EEFCF1"/>
-          </a:solidFill>
+          <a:noFill/>
           <a:ln w="15875">
             <a:solidFill>
-              <a:srgbClr val="D1FADC"/>
+              <a:srgbClr val="EAD07B"/>
             </a:solidFill>
           </a:ln>
         </p:spPr>
@@ -4484,23 +4686,23 @@
       </p:sp>
       <p:sp>
         <p:nvSpPr>
-          <p:cNvPr id="10" name="번호 2"/>
+          <p:cNvPr id="12" name="번호 2"/>
           <p:cNvSpPr/>
           <p:nvPr/>
         </p:nvSpPr>
         <p:spPr>
           <a:xfrm>
-            <a:off x="4566818" y="3246120"/>
+            <a:off x="4536338" y="3429000"/>
             <a:ext cx="457200" cy="457200"/>
           </a:xfrm>
           <a:prstGeom prst="ellipse">
             <a:avLst/>
           </a:prstGeom>
-          <a:solidFill>
-            <a:srgbClr val="26C54E"/>
-          </a:solidFill>
-          <a:ln>
-            <a:noFill/>
+          <a:noFill/>
+          <a:ln w="19050">
+            <a:solidFill>
+              <a:srgbClr val="EAD07B"/>
+            </a:solidFill>
           </a:ln>
         </p:spPr>
         <p:txBody>
@@ -4517,7 +4719,7 @@
             <a:r>
               <a:rPr sz="1600" b="1" i="0">
                 <a:solidFill>
-                  <a:srgbClr val="FFFFFF"/>
+                  <a:srgbClr val="494127"/>
                 </a:solidFill>
               </a:rPr>
               <a:t>2</a:t>
@@ -4527,14 +4729,14 @@
       </p:sp>
       <p:sp>
         <p:nvSpPr>
-          <p:cNvPr id="11" name="TextBox 10"/>
+          <p:cNvPr id="13" name="TextBox 12"/>
           <p:cNvSpPr txBox="1"/>
           <p:nvPr/>
         </p:nvSpPr>
         <p:spPr>
           <a:xfrm>
-            <a:off x="4521098" y="3840480"/>
-            <a:ext cx="3149498" cy="640080"/>
+            <a:off x="4490618" y="4023360"/>
+            <a:ext cx="3210458" cy="640080"/>
           </a:xfrm>
           <a:prstGeom prst="rect">
             <a:avLst/>
@@ -4555,7 +4757,7 @@
             <a:r>
               <a:rPr sz="1800" b="1" i="0">
                 <a:solidFill>
-                  <a:srgbClr val="115F25"/>
+                  <a:srgbClr val="494127"/>
                 </a:solidFill>
               </a:rPr>
               <a:t>해 볼 것</a:t>
@@ -4565,14 +4767,14 @@
       </p:sp>
       <p:sp>
         <p:nvSpPr>
-          <p:cNvPr id="12" name="TextBox 11"/>
+          <p:cNvPr id="14" name="TextBox 13"/>
           <p:cNvSpPr txBox="1"/>
           <p:nvPr/>
         </p:nvSpPr>
         <p:spPr>
           <a:xfrm>
-            <a:off x="4521098" y="4526280"/>
-            <a:ext cx="3149498" cy="1417319"/>
+            <a:off x="4490618" y="4709160"/>
+            <a:ext cx="3210458" cy="1417319"/>
           </a:xfrm>
           <a:prstGeom prst="rect">
             <a:avLst/>
@@ -4593,7 +4795,7 @@
             <a:r>
               <a:rPr sz="1600" b="0" i="0">
                 <a:solidFill>
-                  <a:srgbClr val="2B2B2B"/>
+                  <a:srgbClr val="26231F"/>
                 </a:solidFill>
               </a:rPr>
               <a:t>내용을 입력하세요</a:t>
@@ -4608,7 +4810,7 @@
             <a:r>
               <a:rPr sz="1600" b="0" i="0">
                 <a:solidFill>
-                  <a:srgbClr val="2B2B2B"/>
+                  <a:srgbClr val="26231F"/>
                 </a:solidFill>
               </a:rPr>
               <a:t>내용을 입력하세요</a:t>
@@ -4618,26 +4820,24 @@
       </p:sp>
       <p:sp>
         <p:nvSpPr>
-          <p:cNvPr id="13" name="카드 3"/>
+          <p:cNvPr id="15" name="카드 3"/>
           <p:cNvSpPr/>
           <p:nvPr/>
         </p:nvSpPr>
         <p:spPr>
           <a:xfrm>
-            <a:off x="8036356" y="3063240"/>
-            <a:ext cx="3423818" cy="3017520"/>
+            <a:off x="8066836" y="3246120"/>
+            <a:ext cx="3484778" cy="3017520"/>
           </a:xfrm>
           <a:prstGeom prst="roundRect">
             <a:avLst>
-              <a:gd name="adj" fmla="val 8000"/>
+              <a:gd name="adj" fmla="val 7000"/>
             </a:avLst>
           </a:prstGeom>
-          <a:solidFill>
-            <a:srgbClr val="EEFCF1"/>
-          </a:solidFill>
+          <a:noFill/>
           <a:ln w="15875">
             <a:solidFill>
-              <a:srgbClr val="D1FADC"/>
+              <a:srgbClr val="EAD07B"/>
             </a:solidFill>
           </a:ln>
         </p:spPr>
@@ -4651,23 +4851,23 @@
       </p:sp>
       <p:sp>
         <p:nvSpPr>
-          <p:cNvPr id="14" name="번호 3"/>
+          <p:cNvPr id="16" name="번호 3"/>
           <p:cNvSpPr/>
           <p:nvPr/>
         </p:nvSpPr>
         <p:spPr>
           <a:xfrm>
-            <a:off x="8219236" y="3246120"/>
+            <a:off x="8249716" y="3429000"/>
             <a:ext cx="457200" cy="457200"/>
           </a:xfrm>
           <a:prstGeom prst="ellipse">
             <a:avLst/>
           </a:prstGeom>
-          <a:solidFill>
-            <a:srgbClr val="26C54E"/>
-          </a:solidFill>
-          <a:ln>
-            <a:noFill/>
+          <a:noFill/>
+          <a:ln w="19050">
+            <a:solidFill>
+              <a:srgbClr val="EAD07B"/>
+            </a:solidFill>
           </a:ln>
         </p:spPr>
         <p:txBody>
@@ -4684,7 +4884,7 @@
             <a:r>
               <a:rPr sz="1600" b="1" i="0">
                 <a:solidFill>
-                  <a:srgbClr val="FFFFFF"/>
+                  <a:srgbClr val="494127"/>
                 </a:solidFill>
               </a:rPr>
               <a:t>3</a:t>
@@ -4694,14 +4894,14 @@
       </p:sp>
       <p:sp>
         <p:nvSpPr>
-          <p:cNvPr id="15" name="TextBox 14"/>
+          <p:cNvPr id="17" name="TextBox 16"/>
           <p:cNvSpPr txBox="1"/>
           <p:nvPr/>
         </p:nvSpPr>
         <p:spPr>
           <a:xfrm>
-            <a:off x="8173516" y="3840480"/>
-            <a:ext cx="3149498" cy="640080"/>
+            <a:off x="8203996" y="4023360"/>
+            <a:ext cx="3210458" cy="640080"/>
           </a:xfrm>
           <a:prstGeom prst="rect">
             <a:avLst/>
@@ -4722,7 +4922,7 @@
             <a:r>
               <a:rPr sz="1800" b="1" i="0">
                 <a:solidFill>
-                  <a:srgbClr val="115F25"/>
+                  <a:srgbClr val="494127"/>
                 </a:solidFill>
               </a:rPr>
               <a:t>기억할 것</a:t>
@@ -4732,14 +4932,14 @@
       </p:sp>
       <p:sp>
         <p:nvSpPr>
-          <p:cNvPr id="16" name="TextBox 15"/>
+          <p:cNvPr id="18" name="TextBox 17"/>
           <p:cNvSpPr txBox="1"/>
           <p:nvPr/>
         </p:nvSpPr>
         <p:spPr>
           <a:xfrm>
-            <a:off x="8173516" y="4526280"/>
-            <a:ext cx="3149498" cy="1417319"/>
+            <a:off x="8203996" y="4709160"/>
+            <a:ext cx="3210458" cy="1417319"/>
           </a:xfrm>
           <a:prstGeom prst="rect">
             <a:avLst/>
@@ -4760,7 +4960,7 @@
             <a:r>
               <a:rPr sz="1600" b="0" i="0">
                 <a:solidFill>
-                  <a:srgbClr val="2B2B2B"/>
+                  <a:srgbClr val="26231F"/>
                 </a:solidFill>
               </a:rPr>
               <a:t>내용을 입력하세요</a:t>
@@ -4775,7 +4975,7 @@
             <a:r>
               <a:rPr sz="1600" b="0" i="0">
                 <a:solidFill>
-                  <a:srgbClr val="2B2B2B"/>
+                  <a:srgbClr val="26231F"/>
                 </a:solidFill>
               </a:rPr>
               <a:t>내용을 입력하세요</a:t>
@@ -4797,7 +4997,7 @@
     <p:bg>
       <p:bgPr>
         <a:solidFill>
-          <a:srgbClr val="26C54E"/>
+          <a:srgbClr val="FFFFFF"/>
         </a:solidFill>
         <a:effectLst/>
       </p:bgPr>
@@ -4817,16 +5017,83 @@
         </p:nvSpPr>
         <p:spPr>
           <a:xfrm>
-            <a:off x="274320" y="274320"/>
-            <a:ext cx="11643055" cy="6309360"/>
+            <a:off x="640080" y="566928"/>
+            <a:ext cx="64008" cy="868680"/>
           </a:xfrm>
           <a:prstGeom prst="roundRect">
             <a:avLst>
-              <a:gd name="adj" fmla="val 3500"/>
+              <a:gd name="adj" fmla="val 50000"/>
             </a:avLst>
           </a:prstGeom>
           <a:solidFill>
-            <a:srgbClr val="FFFFFF"/>
+            <a:srgbClr val="EAD07B"/>
+          </a:solidFill>
+          <a:ln>
+            <a:noFill/>
+          </a:ln>
+        </p:spPr>
+        <p:txBody>
+          <a:bodyPr rtlCol="0" anchor="ctr"/>
+          <a:lstStyle/>
+          <a:p>
+            <a:pPr algn="ctr"/>
+          </a:p>
+        </p:txBody>
+      </p:sp>
+      <p:sp>
+        <p:nvSpPr>
+          <p:cNvPr id="4" name="상단 라벨"/>
+          <p:cNvSpPr txBox="1"/>
+          <p:nvPr/>
+        </p:nvSpPr>
+        <p:spPr>
+          <a:xfrm>
+            <a:off x="868680" y="274320"/>
+            <a:ext cx="5486400" cy="274320"/>
+          </a:xfrm>
+          <a:prstGeom prst="rect">
+            <a:avLst/>
+          </a:prstGeom>
+          <a:noFill/>
+        </p:spPr>
+        <p:txBody>
+          <a:bodyPr wrap="square" lIns="54864" rIns="54864" tIns="27432" bIns="27432" anchor="ctr">
+            <a:noAutofit/>
+          </a:bodyPr>
+          <a:lstStyle/>
+          <a:p>
+            <a:pPr algn="l">
+              <a:lnSpc>
+                <a:spcPct val="115000"/>
+              </a:lnSpc>
+            </a:pPr>
+            <a:r>
+              <a:rPr sz="900" b="1" i="0" spc="250">
+                <a:solidFill>
+                  <a:srgbClr val="8E8780"/>
+                </a:solidFill>
+              </a:rPr>
+              <a:t>PRESENTATION</a:t>
+            </a:r>
+          </a:p>
+        </p:txBody>
+      </p:sp>
+      <p:sp>
+        <p:nvSpPr>
+          <p:cNvPr id="5" name="포인트"/>
+          <p:cNvSpPr/>
+          <p:nvPr/>
+        </p:nvSpPr>
+        <p:spPr>
+          <a:xfrm rot="18900000">
+            <a:off x="11167567" y="667512"/>
+            <a:ext cx="310896" cy="310896"/>
+          </a:xfrm>
+          <a:prstGeom prst="teardrop">
+            <a:avLst/>
+          </a:prstGeom>
+          <a:solidFill>
+            <a:srgbClr val="F3E1A5"/>
           </a:solidFill>
           <a:ln>
             <a:noFill/>
@@ -4852,7 +5119,7 @@
         </p:nvSpPr>
         <p:spPr>
           <a:xfrm>
-            <a:off x="731520" y="548640"/>
+            <a:off x="868680" y="566928"/>
             <a:ext cx="9448495" cy="868680"/>
           </a:xfrm>
         </p:spPr>
@@ -4870,7 +5137,7 @@
             <a:r>
               <a:rPr sz="3000" b="1" i="0">
                 <a:solidFill>
-                  <a:srgbClr val="115F25"/>
+                  <a:srgbClr val="26231F"/>
                 </a:solidFill>
               </a:rPr>
               <a:t>한눈에 비교</a:t>
@@ -4880,26 +5147,24 @@
       </p:sp>
       <p:sp>
         <p:nvSpPr>
-          <p:cNvPr id="4" name="왼쪽 칸"/>
+          <p:cNvPr id="6" name="왼쪽 칸"/>
           <p:cNvSpPr/>
           <p:nvPr/>
         </p:nvSpPr>
         <p:spPr>
           <a:xfrm>
-            <a:off x="731520" y="1600200"/>
-            <a:ext cx="5181447" cy="4617720"/>
+            <a:off x="640080" y="1783080"/>
+            <a:ext cx="5272887" cy="3291840"/>
           </a:xfrm>
           <a:prstGeom prst="roundRect">
             <a:avLst>
-              <a:gd name="adj" fmla="val 8000"/>
+              <a:gd name="adj" fmla="val 7000"/>
             </a:avLst>
           </a:prstGeom>
-          <a:solidFill>
-            <a:srgbClr val="EEFCF1"/>
-          </a:solidFill>
-          <a:ln w="12700">
+          <a:noFill/>
+          <a:ln w="15875">
             <a:solidFill>
-              <a:srgbClr val="D1FADC"/>
+              <a:srgbClr val="EAD07B"/>
             </a:solidFill>
           </a:ln>
         </p:spPr>
@@ -4913,14 +5178,14 @@
       </p:sp>
       <p:sp>
         <p:nvSpPr>
-          <p:cNvPr id="5" name="칸 제목 바"/>
+          <p:cNvPr id="7" name="칸 제목 바"/>
           <p:cNvSpPr/>
           <p:nvPr/>
         </p:nvSpPr>
         <p:spPr>
           <a:xfrm>
-            <a:off x="731520" y="1600200"/>
-            <a:ext cx="5181447" cy="640080"/>
+            <a:off x="640080" y="1783080"/>
+            <a:ext cx="5272887" cy="640080"/>
           </a:xfrm>
           <a:prstGeom prst="roundRect">
             <a:avLst>
@@ -4928,7 +5193,7 @@
             </a:avLst>
           </a:prstGeom>
           <a:solidFill>
-            <a:srgbClr val="26C54E"/>
+            <a:srgbClr val="EAD07B"/>
           </a:solidFill>
           <a:ln>
             <a:noFill/>
@@ -4944,14 +5209,14 @@
       </p:sp>
       <p:sp>
         <p:nvSpPr>
-          <p:cNvPr id="6" name="TextBox 5"/>
+          <p:cNvPr id="8" name="TextBox 7"/>
           <p:cNvSpPr txBox="1"/>
           <p:nvPr/>
         </p:nvSpPr>
         <p:spPr>
           <a:xfrm>
-            <a:off x="914400" y="1600200"/>
-            <a:ext cx="4815687" cy="640080"/>
+            <a:off x="822959" y="1783080"/>
+            <a:ext cx="4907127" cy="640080"/>
           </a:xfrm>
           <a:prstGeom prst="rect">
             <a:avLst/>
@@ -4972,7 +5237,7 @@
             <a:r>
               <a:rPr sz="1800" b="1" i="0">
                 <a:solidFill>
-                  <a:srgbClr val="FFFFFF"/>
+                  <a:srgbClr val="26231F"/>
                 </a:solidFill>
               </a:rPr>
               <a:t>알기 전</a:t>
@@ -4982,14 +5247,14 @@
       </p:sp>
       <p:sp>
         <p:nvSpPr>
-          <p:cNvPr id="7" name="TextBox 6"/>
+          <p:cNvPr id="9" name="TextBox 8"/>
           <p:cNvSpPr txBox="1"/>
           <p:nvPr/>
         </p:nvSpPr>
         <p:spPr>
           <a:xfrm>
-            <a:off x="960120" y="2423160"/>
-            <a:ext cx="4724247" cy="3703320"/>
+            <a:off x="868680" y="2606040"/>
+            <a:ext cx="4815687" cy="2377440"/>
           </a:xfrm>
           <a:prstGeom prst="rect">
             <a:avLst/>
@@ -5015,7 +5280,7 @@
             <a:r>
               <a:rPr sz="1500" b="0" i="0">
                 <a:solidFill>
-                  <a:srgbClr val="2B2B2B"/>
+                  <a:srgbClr val="26231F"/>
                 </a:solidFill>
               </a:rPr>
               <a:t>내용을 입력하세요</a:t>
@@ -5035,7 +5300,7 @@
             <a:r>
               <a:rPr sz="1500" b="0" i="0">
                 <a:solidFill>
-                  <a:srgbClr val="2B2B2B"/>
+                  <a:srgbClr val="26231F"/>
                 </a:solidFill>
               </a:rPr>
               <a:t>내용을 입력하세요</a:t>
@@ -5055,7 +5320,7 @@
             <a:r>
               <a:rPr sz="1500" b="0" i="0">
                 <a:solidFill>
-                  <a:srgbClr val="2B2B2B"/>
+                  <a:srgbClr val="26231F"/>
                 </a:solidFill>
               </a:rPr>
               <a:t>내용을 입력하세요</a:t>
@@ -5065,26 +5330,24 @@
       </p:sp>
       <p:sp>
         <p:nvSpPr>
-          <p:cNvPr id="8" name="오른쪽 칸"/>
+          <p:cNvPr id="10" name="오른쪽 칸"/>
           <p:cNvSpPr/>
           <p:nvPr/>
         </p:nvSpPr>
         <p:spPr>
           <a:xfrm>
-            <a:off x="6278727" y="1600200"/>
-            <a:ext cx="5181447" cy="4617720"/>
+            <a:off x="6278727" y="1783080"/>
+            <a:ext cx="5272887" cy="3291840"/>
           </a:xfrm>
           <a:prstGeom prst="roundRect">
             <a:avLst>
-              <a:gd name="adj" fmla="val 8000"/>
+              <a:gd name="adj" fmla="val 7000"/>
             </a:avLst>
           </a:prstGeom>
-          <a:solidFill>
-            <a:srgbClr val="D1FADC"/>
-          </a:solidFill>
-          <a:ln w="12700">
+          <a:noFill/>
+          <a:ln w="15875">
             <a:solidFill>
-              <a:srgbClr val="D1FADC"/>
+              <a:srgbClr val="EAD07B"/>
             </a:solidFill>
           </a:ln>
         </p:spPr>
@@ -5098,14 +5361,14 @@
       </p:sp>
       <p:sp>
         <p:nvSpPr>
-          <p:cNvPr id="9" name="칸 제목 바"/>
+          <p:cNvPr id="11" name="칸 제목 바"/>
           <p:cNvSpPr/>
           <p:nvPr/>
         </p:nvSpPr>
         <p:spPr>
           <a:xfrm>
-            <a:off x="6278727" y="1600200"/>
-            <a:ext cx="5181447" cy="640080"/>
+            <a:off x="6278727" y="1783080"/>
+            <a:ext cx="5272887" cy="640080"/>
           </a:xfrm>
           <a:prstGeom prst="roundRect">
             <a:avLst>
@@ -5113,7 +5376,7 @@
             </a:avLst>
           </a:prstGeom>
           <a:solidFill>
-            <a:srgbClr val="115F25"/>
+            <a:srgbClr val="494127"/>
           </a:solidFill>
           <a:ln>
             <a:noFill/>
@@ -5129,14 +5392,14 @@
       </p:sp>
       <p:sp>
         <p:nvSpPr>
-          <p:cNvPr id="10" name="TextBox 9"/>
+          <p:cNvPr id="12" name="TextBox 11"/>
           <p:cNvSpPr txBox="1"/>
           <p:nvPr/>
         </p:nvSpPr>
         <p:spPr>
           <a:xfrm>
-            <a:off x="6461607" y="1600200"/>
-            <a:ext cx="4815687" cy="640080"/>
+            <a:off x="6461607" y="1783080"/>
+            <a:ext cx="4907127" cy="640080"/>
           </a:xfrm>
           <a:prstGeom prst="rect">
             <a:avLst/>
@@ -5167,14 +5430,14 @@
       </p:sp>
       <p:sp>
         <p:nvSpPr>
-          <p:cNvPr id="11" name="TextBox 10"/>
+          <p:cNvPr id="13" name="TextBox 12"/>
           <p:cNvSpPr txBox="1"/>
           <p:nvPr/>
         </p:nvSpPr>
         <p:spPr>
           <a:xfrm>
-            <a:off x="6507327" y="2423160"/>
-            <a:ext cx="4724247" cy="3703320"/>
+            <a:off x="6507327" y="2606040"/>
+            <a:ext cx="4815687" cy="2377440"/>
           </a:xfrm>
           <a:prstGeom prst="rect">
             <a:avLst/>
@@ -5200,7 +5463,7 @@
             <a:r>
               <a:rPr sz="1500" b="0" i="0">
                 <a:solidFill>
-                  <a:srgbClr val="2B2B2B"/>
+                  <a:srgbClr val="26231F"/>
                 </a:solidFill>
               </a:rPr>
               <a:t>내용을 입력하세요</a:t>
@@ -5220,7 +5483,7 @@
             <a:r>
               <a:rPr sz="1500" b="0" i="0">
                 <a:solidFill>
-                  <a:srgbClr val="2B2B2B"/>
+                  <a:srgbClr val="26231F"/>
                 </a:solidFill>
               </a:rPr>
               <a:t>내용을 입력하세요</a:t>
@@ -5240,7 +5503,7 @@
             <a:r>
               <a:rPr sz="1500" b="0" i="0">
                 <a:solidFill>
-                  <a:srgbClr val="2B2B2B"/>
+                  <a:srgbClr val="26231F"/>
                 </a:solidFill>
               </a:rPr>
               <a:t>내용을 입력하세요</a:t>
@@ -5262,7 +5525,7 @@
     <p:bg>
       <p:bgPr>
         <a:solidFill>
-          <a:srgbClr val="26C54E"/>
+          <a:srgbClr val="FFFFFF"/>
         </a:solidFill>
         <a:effectLst/>
       </p:bgPr>
@@ -5282,16 +5545,83 @@
         </p:nvSpPr>
         <p:spPr>
           <a:xfrm>
-            <a:off x="274320" y="274320"/>
-            <a:ext cx="11643055" cy="6309360"/>
+            <a:off x="640080" y="566928"/>
+            <a:ext cx="64008" cy="868680"/>
           </a:xfrm>
           <a:prstGeom prst="roundRect">
             <a:avLst>
-              <a:gd name="adj" fmla="val 3500"/>
+              <a:gd name="adj" fmla="val 50000"/>
             </a:avLst>
           </a:prstGeom>
           <a:solidFill>
-            <a:srgbClr val="FFFFFF"/>
+            <a:srgbClr val="EAD07B"/>
+          </a:solidFill>
+          <a:ln>
+            <a:noFill/>
+          </a:ln>
+        </p:spPr>
+        <p:txBody>
+          <a:bodyPr rtlCol="0" anchor="ctr"/>
+          <a:lstStyle/>
+          <a:p>
+            <a:pPr algn="ctr"/>
+          </a:p>
+        </p:txBody>
+      </p:sp>
+      <p:sp>
+        <p:nvSpPr>
+          <p:cNvPr id="4" name="상단 라벨"/>
+          <p:cNvSpPr txBox="1"/>
+          <p:nvPr/>
+        </p:nvSpPr>
+        <p:spPr>
+          <a:xfrm>
+            <a:off x="868680" y="274320"/>
+            <a:ext cx="5486400" cy="274320"/>
+          </a:xfrm>
+          <a:prstGeom prst="rect">
+            <a:avLst/>
+          </a:prstGeom>
+          <a:noFill/>
+        </p:spPr>
+        <p:txBody>
+          <a:bodyPr wrap="square" lIns="54864" rIns="54864" tIns="27432" bIns="27432" anchor="ctr">
+            <a:noAutofit/>
+          </a:bodyPr>
+          <a:lstStyle/>
+          <a:p>
+            <a:pPr algn="l">
+              <a:lnSpc>
+                <a:spcPct val="115000"/>
+              </a:lnSpc>
+            </a:pPr>
+            <a:r>
+              <a:rPr sz="900" b="1" i="0" spc="250">
+                <a:solidFill>
+                  <a:srgbClr val="8E8780"/>
+                </a:solidFill>
+              </a:rPr>
+              <a:t>PRESENTATION</a:t>
+            </a:r>
+          </a:p>
+        </p:txBody>
+      </p:sp>
+      <p:sp>
+        <p:nvSpPr>
+          <p:cNvPr id="5" name="포인트"/>
+          <p:cNvSpPr/>
+          <p:nvPr/>
+        </p:nvSpPr>
+        <p:spPr>
+          <a:xfrm rot="18900000">
+            <a:off x="11167567" y="667512"/>
+            <a:ext cx="310896" cy="310896"/>
+          </a:xfrm>
+          <a:prstGeom prst="teardrop">
+            <a:avLst/>
+          </a:prstGeom>
+          <a:solidFill>
+            <a:srgbClr val="F3E1A5"/>
           </a:solidFill>
           <a:ln>
             <a:noFill/>
@@ -5317,7 +5647,7 @@
         </p:nvSpPr>
         <p:spPr>
           <a:xfrm>
-            <a:off x="731520" y="548640"/>
+            <a:off x="868680" y="566928"/>
             <a:ext cx="9448495" cy="868680"/>
           </a:xfrm>
         </p:spPr>
@@ -5335,7 +5665,7 @@
             <a:r>
               <a:rPr sz="3000" b="1" i="0">
                 <a:solidFill>
-                  <a:srgbClr val="115F25"/>
+                  <a:srgbClr val="26231F"/>
                 </a:solidFill>
               </a:rPr>
               <a:t>일정·현황</a:t>
@@ -5345,15 +5675,15 @@
       </p:sp>
       <p:graphicFrame>
         <p:nvGraphicFramePr>
-          <p:cNvPr id="4" name="표"/>
+          <p:cNvPr id="6" name="표"/>
           <p:cNvGraphicFramePr>
             <a:graphicFrameLocks noGrp="1"/>
           </p:cNvGraphicFramePr>
           <p:nvPr/>
         </p:nvGraphicFramePr>
         <p:xfrm>
-          <a:off x="731520" y="1600200"/>
-          <a:ext cx="10728652" cy="3840480"/>
+          <a:off x="640080" y="1783080"/>
+          <a:ext cx="10911532" cy="3840480"/>
         </p:xfrm>
         <a:graphic>
           <a:graphicData uri="http://schemas.openxmlformats.org/drawingml/2006/table">
@@ -5362,10 +5692,10 @@
                 <a:tableStyleId>{5C22544A-7EE6-4342-B048-85BDC9FD1C3A}</a:tableStyleId>
               </a:tblPr>
               <a:tblGrid>
-                <a:gridCol w="2682163"/>
-                <a:gridCol w="2682163"/>
-                <a:gridCol w="2682163"/>
-                <a:gridCol w="2682163"/>
+                <a:gridCol w="2727883"/>
+                <a:gridCol w="2727883"/>
+                <a:gridCol w="2727883"/>
+                <a:gridCol w="2727883"/>
               </a:tblGrid>
               <a:tr h="640080">
                 <a:tc>
@@ -5377,7 +5707,7 @@
                       <a:r>
                         <a:rPr sz="1500" b="1">
                           <a:solidFill>
-                            <a:srgbClr val="FFFFFF"/>
+                            <a:srgbClr val="26231F"/>
                           </a:solidFill>
                         </a:rPr>
                         <a:t>차시</a:t>
@@ -5387,30 +5717,30 @@
                   <a:tcPr anchor="ctr" marL="73152" marR="73152">
                     <a:lnL w="9525" cap="flat" cmpd="sng" algn="ctr">
                       <a:solidFill>
-                        <a:srgbClr val="26C54E"/>
+                        <a:srgbClr val="EAD07B"/>
                       </a:solidFill>
                       <a:prstDash val="solid"/>
                     </a:lnL>
                     <a:lnR w="9525" cap="flat" cmpd="sng" algn="ctr">
                       <a:solidFill>
-                        <a:srgbClr val="26C54E"/>
+                        <a:srgbClr val="EAD07B"/>
                       </a:solidFill>
                       <a:prstDash val="solid"/>
                     </a:lnR>
                     <a:lnT w="9525" cap="flat" cmpd="sng" algn="ctr">
                       <a:solidFill>
-                        <a:srgbClr val="26C54E"/>
+                        <a:srgbClr val="EAD07B"/>
                       </a:solidFill>
                       <a:prstDash val="solid"/>
                     </a:lnT>
                     <a:lnB w="9525" cap="flat" cmpd="sng" algn="ctr">
                       <a:solidFill>
-                        <a:srgbClr val="26C54E"/>
+                        <a:srgbClr val="EAD07B"/>
                       </a:solidFill>
                       <a:prstDash val="solid"/>
                     </a:lnB>
                     <a:solidFill>
-                      <a:srgbClr val="26C54E"/>
+                      <a:srgbClr val="EAD07B"/>
                     </a:solidFill>
                   </a:tcPr>
                 </a:tc>
@@ -5423,7 +5753,7 @@
                       <a:r>
                         <a:rPr sz="1500" b="1">
                           <a:solidFill>
-                            <a:srgbClr val="FFFFFF"/>
+                            <a:srgbClr val="26231F"/>
                           </a:solidFill>
                         </a:rPr>
                         <a:t>주제</a:t>
@@ -5433,30 +5763,30 @@
                   <a:tcPr anchor="ctr" marL="73152" marR="73152">
                     <a:lnL w="9525" cap="flat" cmpd="sng" algn="ctr">
                       <a:solidFill>
-                        <a:srgbClr val="26C54E"/>
+                        <a:srgbClr val="EAD07B"/>
                       </a:solidFill>
                       <a:prstDash val="solid"/>
                     </a:lnL>
                     <a:lnR w="9525" cap="flat" cmpd="sng" algn="ctr">
                       <a:solidFill>
-                        <a:srgbClr val="26C54E"/>
+                        <a:srgbClr val="EAD07B"/>
                       </a:solidFill>
                       <a:prstDash val="solid"/>
                     </a:lnR>
                     <a:lnT w="9525" cap="flat" cmpd="sng" algn="ctr">
                       <a:solidFill>
-                        <a:srgbClr val="26C54E"/>
+                        <a:srgbClr val="EAD07B"/>
                       </a:solidFill>
                       <a:prstDash val="solid"/>
                     </a:lnT>
                     <a:lnB w="9525" cap="flat" cmpd="sng" algn="ctr">
                       <a:solidFill>
-                        <a:srgbClr val="26C54E"/>
+                        <a:srgbClr val="EAD07B"/>
                       </a:solidFill>
                       <a:prstDash val="solid"/>
                     </a:lnB>
                     <a:solidFill>
-                      <a:srgbClr val="26C54E"/>
+                      <a:srgbClr val="EAD07B"/>
                     </a:solidFill>
                   </a:tcPr>
                 </a:tc>
@@ -5469,7 +5799,7 @@
                       <a:r>
                         <a:rPr sz="1500" b="1">
                           <a:solidFill>
-                            <a:srgbClr val="FFFFFF"/>
+                            <a:srgbClr val="26231F"/>
                           </a:solidFill>
                         </a:rPr>
                         <a:t>시간</a:t>
@@ -5479,30 +5809,30 @@
                   <a:tcPr anchor="ctr" marL="73152" marR="73152">
                     <a:lnL w="9525" cap="flat" cmpd="sng" algn="ctr">
                       <a:solidFill>
-                        <a:srgbClr val="26C54E"/>
+                        <a:srgbClr val="EAD07B"/>
                       </a:solidFill>
                       <a:prstDash val="solid"/>
                     </a:lnL>
                     <a:lnR w="9525" cap="flat" cmpd="sng" algn="ctr">
                       <a:solidFill>
-                        <a:srgbClr val="26C54E"/>
+                        <a:srgbClr val="EAD07B"/>
                       </a:solidFill>
                       <a:prstDash val="solid"/>
                     </a:lnR>
                     <a:lnT w="9525" cap="flat" cmpd="sng" algn="ctr">
                       <a:solidFill>
-                        <a:srgbClr val="26C54E"/>
+                        <a:srgbClr val="EAD07B"/>
                       </a:solidFill>
                       <a:prstDash val="solid"/>
                     </a:lnT>
                     <a:lnB w="9525" cap="flat" cmpd="sng" algn="ctr">
                       <a:solidFill>
-                        <a:srgbClr val="26C54E"/>
+                        <a:srgbClr val="EAD07B"/>
                       </a:solidFill>
                       <a:prstDash val="solid"/>
                     </a:lnB>
                     <a:solidFill>
-                      <a:srgbClr val="26C54E"/>
+                      <a:srgbClr val="EAD07B"/>
                     </a:solidFill>
                   </a:tcPr>
                 </a:tc>
@@ -5515,7 +5845,7 @@
                       <a:r>
                         <a:rPr sz="1500" b="1">
                           <a:solidFill>
-                            <a:srgbClr val="FFFFFF"/>
+                            <a:srgbClr val="26231F"/>
                           </a:solidFill>
                         </a:rPr>
                         <a:t>준비물</a:t>
@@ -5525,30 +5855,30 @@
                   <a:tcPr anchor="ctr" marL="73152" marR="73152">
                     <a:lnL w="9525" cap="flat" cmpd="sng" algn="ctr">
                       <a:solidFill>
-                        <a:srgbClr val="26C54E"/>
+                        <a:srgbClr val="EAD07B"/>
                       </a:solidFill>
                       <a:prstDash val="solid"/>
                     </a:lnL>
                     <a:lnR w="9525" cap="flat" cmpd="sng" algn="ctr">
                       <a:solidFill>
-                        <a:srgbClr val="26C54E"/>
+                        <a:srgbClr val="EAD07B"/>
                       </a:solidFill>
                       <a:prstDash val="solid"/>
                     </a:lnR>
                     <a:lnT w="9525" cap="flat" cmpd="sng" algn="ctr">
                       <a:solidFill>
-                        <a:srgbClr val="26C54E"/>
+                        <a:srgbClr val="EAD07B"/>
                       </a:solidFill>
                       <a:prstDash val="solid"/>
                     </a:lnT>
                     <a:lnB w="9525" cap="flat" cmpd="sng" algn="ctr">
                       <a:solidFill>
-                        <a:srgbClr val="26C54E"/>
+                        <a:srgbClr val="EAD07B"/>
                       </a:solidFill>
                       <a:prstDash val="solid"/>
                     </a:lnB>
                     <a:solidFill>
-                      <a:srgbClr val="26C54E"/>
+                      <a:srgbClr val="EAD07B"/>
                     </a:solidFill>
                   </a:tcPr>
                 </a:tc>
@@ -5563,7 +5893,7 @@
                       <a:r>
                         <a:rPr sz="1500" b="1">
                           <a:solidFill>
-                            <a:srgbClr val="115F25"/>
+                            <a:srgbClr val="494127"/>
                           </a:solidFill>
                         </a:rPr>
                         <a:t>1</a:t>
@@ -5573,30 +5903,30 @@
                   <a:tcPr anchor="ctr" marL="73152" marR="73152">
                     <a:lnL w="9525" cap="flat" cmpd="sng" algn="ctr">
                       <a:solidFill>
-                        <a:srgbClr val="D1FADC"/>
+                        <a:srgbClr val="FAF1D1"/>
                       </a:solidFill>
                       <a:prstDash val="solid"/>
                     </a:lnL>
                     <a:lnR w="9525" cap="flat" cmpd="sng" algn="ctr">
                       <a:solidFill>
-                        <a:srgbClr val="D1FADC"/>
+                        <a:srgbClr val="FAF1D1"/>
                       </a:solidFill>
                       <a:prstDash val="solid"/>
                     </a:lnR>
                     <a:lnT w="9525" cap="flat" cmpd="sng" algn="ctr">
                       <a:solidFill>
-                        <a:srgbClr val="D1FADC"/>
+                        <a:srgbClr val="FAF1D1"/>
                       </a:solidFill>
                       <a:prstDash val="solid"/>
                     </a:lnT>
                     <a:lnB w="9525" cap="flat" cmpd="sng" algn="ctr">
                       <a:solidFill>
-                        <a:srgbClr val="D1FADC"/>
+                        <a:srgbClr val="FAF1D1"/>
                       </a:solidFill>
                       <a:prstDash val="solid"/>
                     </a:lnB>
                     <a:solidFill>
-                      <a:srgbClr val="D1FADC"/>
+                      <a:srgbClr val="FAF1D1"/>
                     </a:solidFill>
                   </a:tcPr>
                 </a:tc>
@@ -5609,7 +5939,7 @@
                       <a:r>
                         <a:rPr sz="1500" b="0">
                           <a:solidFill>
-                            <a:srgbClr val="2B2B2B"/>
+                            <a:srgbClr val="26231F"/>
                           </a:solidFill>
                         </a:rPr>
                         <a:t>내용 입력</a:t>
@@ -5619,25 +5949,25 @@
                   <a:tcPr anchor="ctr" marL="73152" marR="73152">
                     <a:lnL w="9525" cap="flat" cmpd="sng" algn="ctr">
                       <a:solidFill>
-                        <a:srgbClr val="D1FADC"/>
+                        <a:srgbClr val="FAF1D1"/>
                       </a:solidFill>
                       <a:prstDash val="solid"/>
                     </a:lnL>
                     <a:lnR w="9525" cap="flat" cmpd="sng" algn="ctr">
                       <a:solidFill>
-                        <a:srgbClr val="D1FADC"/>
+                        <a:srgbClr val="FAF1D1"/>
                       </a:solidFill>
                       <a:prstDash val="solid"/>
                     </a:lnR>
                     <a:lnT w="9525" cap="flat" cmpd="sng" algn="ctr">
                       <a:solidFill>
-                        <a:srgbClr val="D1FADC"/>
+                        <a:srgbClr val="FAF1D1"/>
                       </a:solidFill>
                       <a:prstDash val="solid"/>
                     </a:lnT>
                     <a:lnB w="9525" cap="flat" cmpd="sng" algn="ctr">
                       <a:solidFill>
-                        <a:srgbClr val="D1FADC"/>
+                        <a:srgbClr val="FAF1D1"/>
                       </a:solidFill>
                       <a:prstDash val="solid"/>
                     </a:lnB>
@@ -5655,7 +5985,7 @@
                       <a:r>
                         <a:rPr sz="1500" b="0">
                           <a:solidFill>
-                            <a:srgbClr val="2B2B2B"/>
+                            <a:srgbClr val="26231F"/>
                           </a:solidFill>
                         </a:rPr>
                         <a:t/>
@@ -5665,25 +5995,25 @@
                   <a:tcPr anchor="ctr" marL="73152" marR="73152">
                     <a:lnL w="9525" cap="flat" cmpd="sng" algn="ctr">
                       <a:solidFill>
-                        <a:srgbClr val="D1FADC"/>
+                        <a:srgbClr val="FAF1D1"/>
                       </a:solidFill>
                       <a:prstDash val="solid"/>
                     </a:lnL>
                     <a:lnR w="9525" cap="flat" cmpd="sng" algn="ctr">
                       <a:solidFill>
-                        <a:srgbClr val="D1FADC"/>
+                        <a:srgbClr val="FAF1D1"/>
                       </a:solidFill>
                       <a:prstDash val="solid"/>
                     </a:lnR>
                     <a:lnT w="9525" cap="flat" cmpd="sng" algn="ctr">
                       <a:solidFill>
-                        <a:srgbClr val="D1FADC"/>
+                        <a:srgbClr val="FAF1D1"/>
                       </a:solidFill>
                       <a:prstDash val="solid"/>
                     </a:lnT>
                     <a:lnB w="9525" cap="flat" cmpd="sng" algn="ctr">
                       <a:solidFill>
-                        <a:srgbClr val="D1FADC"/>
+                        <a:srgbClr val="FAF1D1"/>
                       </a:solidFill>
                       <a:prstDash val="solid"/>
                     </a:lnB>
@@ -5701,7 +6031,7 @@
                       <a:r>
                         <a:rPr sz="1500" b="0">
                           <a:solidFill>
-                            <a:srgbClr val="2B2B2B"/>
+                            <a:srgbClr val="26231F"/>
                           </a:solidFill>
                         </a:rPr>
                         <a:t/>
@@ -5711,25 +6041,25 @@
                   <a:tcPr anchor="ctr" marL="73152" marR="73152">
                     <a:lnL w="9525" cap="flat" cmpd="sng" algn="ctr">
                       <a:solidFill>
-                        <a:srgbClr val="D1FADC"/>
+                        <a:srgbClr val="FAF1D1"/>
                       </a:solidFill>
                       <a:prstDash val="solid"/>
                     </a:lnL>
                     <a:lnR w="9525" cap="flat" cmpd="sng" algn="ctr">
                       <a:solidFill>
-                        <a:srgbClr val="D1FADC"/>
+                        <a:srgbClr val="FAF1D1"/>
                       </a:solidFill>
                       <a:prstDash val="solid"/>
                     </a:lnR>
                     <a:lnT w="9525" cap="flat" cmpd="sng" algn="ctr">
                       <a:solidFill>
-                        <a:srgbClr val="D1FADC"/>
+                        <a:srgbClr val="FAF1D1"/>
                       </a:solidFill>
                       <a:prstDash val="solid"/>
                     </a:lnT>
                     <a:lnB w="9525" cap="flat" cmpd="sng" algn="ctr">
                       <a:solidFill>
-                        <a:srgbClr val="D1FADC"/>
+                        <a:srgbClr val="FAF1D1"/>
                       </a:solidFill>
                       <a:prstDash val="solid"/>
                     </a:lnB>
@@ -5749,7 +6079,7 @@
                       <a:r>
                         <a:rPr sz="1500" b="1">
                           <a:solidFill>
-                            <a:srgbClr val="115F25"/>
+                            <a:srgbClr val="494127"/>
                           </a:solidFill>
                         </a:rPr>
                         <a:t>2</a:t>
@@ -5759,30 +6089,30 @@
                   <a:tcPr anchor="ctr" marL="73152" marR="73152">
                     <a:lnL w="9525" cap="flat" cmpd="sng" algn="ctr">
                       <a:solidFill>
-                        <a:srgbClr val="D1FADC"/>
+                        <a:srgbClr val="FAF1D1"/>
                       </a:solidFill>
                       <a:prstDash val="solid"/>
                     </a:lnL>
                     <a:lnR w="9525" cap="flat" cmpd="sng" algn="ctr">
                       <a:solidFill>
-                        <a:srgbClr val="D1FADC"/>
+                        <a:srgbClr val="FAF1D1"/>
                       </a:solidFill>
                       <a:prstDash val="solid"/>
                     </a:lnR>
                     <a:lnT w="9525" cap="flat" cmpd="sng" algn="ctr">
                       <a:solidFill>
-                        <a:srgbClr val="D1FADC"/>
+                        <a:srgbClr val="FAF1D1"/>
                       </a:solidFill>
                       <a:prstDash val="solid"/>
                     </a:lnT>
                     <a:lnB w="9525" cap="flat" cmpd="sng" algn="ctr">
                       <a:solidFill>
-                        <a:srgbClr val="D1FADC"/>
+                        <a:srgbClr val="FAF1D1"/>
                       </a:solidFill>
                       <a:prstDash val="solid"/>
                     </a:lnB>
                     <a:solidFill>
-                      <a:srgbClr val="D1FADC"/>
+                      <a:srgbClr val="FAF1D1"/>
                     </a:solidFill>
                   </a:tcPr>
                 </a:tc>
@@ -5795,7 +6125,7 @@
                       <a:r>
                         <a:rPr sz="1500" b="0">
                           <a:solidFill>
-                            <a:srgbClr val="2B2B2B"/>
+                            <a:srgbClr val="26231F"/>
                           </a:solidFill>
                         </a:rPr>
                         <a:t>내용 입력</a:t>
@@ -5805,30 +6135,30 @@
                   <a:tcPr anchor="ctr" marL="73152" marR="73152">
                     <a:lnL w="9525" cap="flat" cmpd="sng" algn="ctr">
                       <a:solidFill>
-                        <a:srgbClr val="D1FADC"/>
+                        <a:srgbClr val="FAF1D1"/>
                       </a:solidFill>
                       <a:prstDash val="solid"/>
                     </a:lnL>
                     <a:lnR w="9525" cap="flat" cmpd="sng" algn="ctr">
                       <a:solidFill>
-                        <a:srgbClr val="D1FADC"/>
+                        <a:srgbClr val="FAF1D1"/>
                       </a:solidFill>
                       <a:prstDash val="solid"/>
                     </a:lnR>
                     <a:lnT w="9525" cap="flat" cmpd="sng" algn="ctr">
                       <a:solidFill>
-                        <a:srgbClr val="D1FADC"/>
+                        <a:srgbClr val="FAF1D1"/>
                       </a:solidFill>
                       <a:prstDash val="solid"/>
                     </a:lnT>
                     <a:lnB w="9525" cap="flat" cmpd="sng" algn="ctr">
                       <a:solidFill>
-                        <a:srgbClr val="D1FADC"/>
+                        <a:srgbClr val="FAF1D1"/>
                       </a:solidFill>
                       <a:prstDash val="solid"/>
                     </a:lnB>
                     <a:solidFill>
-                      <a:srgbClr val="EEFCF1"/>
+                      <a:srgbClr val="FDF8EA"/>
                     </a:solidFill>
                   </a:tcPr>
                 </a:tc>
@@ -5841,7 +6171,7 @@
                       <a:r>
                         <a:rPr sz="1500" b="0">
                           <a:solidFill>
-                            <a:srgbClr val="2B2B2B"/>
+                            <a:srgbClr val="26231F"/>
                           </a:solidFill>
                         </a:rPr>
                         <a:t/>
@@ -5851,30 +6181,30 @@
                   <a:tcPr anchor="ctr" marL="73152" marR="73152">
                     <a:lnL w="9525" cap="flat" cmpd="sng" algn="ctr">
                       <a:solidFill>
-                        <a:srgbClr val="D1FADC"/>
+                        <a:srgbClr val="FAF1D1"/>
                       </a:solidFill>
                       <a:prstDash val="solid"/>
                     </a:lnL>
                     <a:lnR w="9525" cap="flat" cmpd="sng" algn="ctr">
                       <a:solidFill>
-                        <a:srgbClr val="D1FADC"/>
+                        <a:srgbClr val="FAF1D1"/>
                       </a:solidFill>
                       <a:prstDash val="solid"/>
                     </a:lnR>
                     <a:lnT w="9525" cap="flat" cmpd="sng" algn="ctr">
                       <a:solidFill>
-                        <a:srgbClr val="D1FADC"/>
+                        <a:srgbClr val="FAF1D1"/>
                       </a:solidFill>
                       <a:prstDash val="solid"/>
                     </a:lnT>
                     <a:lnB w="9525" cap="flat" cmpd="sng" algn="ctr">
                       <a:solidFill>
-                        <a:srgbClr val="D1FADC"/>
+                        <a:srgbClr val="FAF1D1"/>
                       </a:solidFill>
                       <a:prstDash val="solid"/>
                     </a:lnB>
                     <a:solidFill>
-                      <a:srgbClr val="EEFCF1"/>
+                      <a:srgbClr val="FDF8EA"/>
                     </a:solidFill>
                   </a:tcPr>
                 </a:tc>
@@ -5887,7 +6217,7 @@
                       <a:r>
                         <a:rPr sz="1500" b="0">
                           <a:solidFill>
-                            <a:srgbClr val="2B2B2B"/>
+                            <a:srgbClr val="26231F"/>
                           </a:solidFill>
                         </a:rPr>
                         <a:t/>
@@ -5897,30 +6227,30 @@
                   <a:tcPr anchor="ctr" marL="73152" marR="73152">
                     <a:lnL w="9525" cap="flat" cmpd="sng" algn="ctr">
                       <a:solidFill>
-                        <a:srgbClr val="D1FADC"/>
+                        <a:srgbClr val="FAF1D1"/>
                       </a:solidFill>
                       <a:prstDash val="solid"/>
                     </a:lnL>
                     <a:lnR w="9525" cap="flat" cmpd="sng" algn="ctr">
                       <a:solidFill>
-                        <a:srgbClr val="D1FADC"/>
+                        <a:srgbClr val="FAF1D1"/>
                       </a:solidFill>
                       <a:prstDash val="solid"/>
                     </a:lnR>
                     <a:lnT w="9525" cap="flat" cmpd="sng" algn="ctr">
                       <a:solidFill>
-                        <a:srgbClr val="D1FADC"/>
+                        <a:srgbClr val="FAF1D1"/>
                       </a:solidFill>
                       <a:prstDash val="solid"/>
                     </a:lnT>
                     <a:lnB w="9525" cap="flat" cmpd="sng" algn="ctr">
                       <a:solidFill>
-                        <a:srgbClr val="D1FADC"/>
+                        <a:srgbClr val="FAF1D1"/>
                       </a:solidFill>
                       <a:prstDash val="solid"/>
                     </a:lnB>
                     <a:solidFill>
-                      <a:srgbClr val="EEFCF1"/>
+                      <a:srgbClr val="FDF8EA"/>
                     </a:solidFill>
                   </a:tcPr>
                 </a:tc>
@@ -5935,7 +6265,7 @@
                       <a:r>
                         <a:rPr sz="1500" b="1">
                           <a:solidFill>
-                            <a:srgbClr val="115F25"/>
+                            <a:srgbClr val="494127"/>
                           </a:solidFill>
                         </a:rPr>
                         <a:t>3</a:t>
@@ -5945,30 +6275,30 @@
                   <a:tcPr anchor="ctr" marL="73152" marR="73152">
                     <a:lnL w="9525" cap="flat" cmpd="sng" algn="ctr">
                       <a:solidFill>
-                        <a:srgbClr val="D1FADC"/>
+                        <a:srgbClr val="FAF1D1"/>
                       </a:solidFill>
                       <a:prstDash val="solid"/>
                     </a:lnL>
                     <a:lnR w="9525" cap="flat" cmpd="sng" algn="ctr">
                       <a:solidFill>
-                        <a:srgbClr val="D1FADC"/>
+                        <a:srgbClr val="FAF1D1"/>
                       </a:solidFill>
                       <a:prstDash val="solid"/>
                     </a:lnR>
                     <a:lnT w="9525" cap="flat" cmpd="sng" algn="ctr">
                       <a:solidFill>
-                        <a:srgbClr val="D1FADC"/>
+                        <a:srgbClr val="FAF1D1"/>
                       </a:solidFill>
                       <a:prstDash val="solid"/>
                     </a:lnT>
                     <a:lnB w="9525" cap="flat" cmpd="sng" algn="ctr">
                       <a:solidFill>
-                        <a:srgbClr val="D1FADC"/>
+                        <a:srgbClr val="FAF1D1"/>
                       </a:solidFill>
                       <a:prstDash val="solid"/>
                     </a:lnB>
                     <a:solidFill>
-                      <a:srgbClr val="D1FADC"/>
+                      <a:srgbClr val="FAF1D1"/>
                     </a:solidFill>
                   </a:tcPr>
                 </a:tc>
@@ -5981,7 +6311,7 @@
                       <a:r>
                         <a:rPr sz="1500" b="0">
                           <a:solidFill>
-                            <a:srgbClr val="2B2B2B"/>
+                            <a:srgbClr val="26231F"/>
                           </a:solidFill>
                         </a:rPr>
                         <a:t>내용 입력</a:t>
@@ -5991,25 +6321,25 @@
                   <a:tcPr anchor="ctr" marL="73152" marR="73152">
                     <a:lnL w="9525" cap="flat" cmpd="sng" algn="ctr">
                       <a:solidFill>
-                        <a:srgbClr val="D1FADC"/>
+                        <a:srgbClr val="FAF1D1"/>
                       </a:solidFill>
                       <a:prstDash val="solid"/>
                     </a:lnL>
                     <a:lnR w="9525" cap="flat" cmpd="sng" algn="ctr">
                       <a:solidFill>
-                        <a:srgbClr val="D1FADC"/>
+                        <a:srgbClr val="FAF1D1"/>
                       </a:solidFill>
                       <a:prstDash val="solid"/>
                     </a:lnR>
                     <a:lnT w="9525" cap="flat" cmpd="sng" algn="ctr">
                       <a:solidFill>
-                        <a:srgbClr val="D1FADC"/>
+                        <a:srgbClr val="FAF1D1"/>
                       </a:solidFill>
                       <a:prstDash val="solid"/>
                     </a:lnT>
                     <a:lnB w="9525" cap="flat" cmpd="sng" algn="ctr">
                       <a:solidFill>
-                        <a:srgbClr val="D1FADC"/>
+                        <a:srgbClr val="FAF1D1"/>
                       </a:solidFill>
                       <a:prstDash val="solid"/>
                     </a:lnB>
@@ -6027,7 +6357,7 @@
                       <a:r>
                         <a:rPr sz="1500" b="0">
                           <a:solidFill>
-                            <a:srgbClr val="2B2B2B"/>
+                            <a:srgbClr val="26231F"/>
                           </a:solidFill>
                         </a:rPr>
                         <a:t/>
@@ -6037,25 +6367,25 @@
                   <a:tcPr anchor="ctr" marL="73152" marR="73152">
                     <a:lnL w="9525" cap="flat" cmpd="sng" algn="ctr">
                       <a:solidFill>
-                        <a:srgbClr val="D1FADC"/>
+                        <a:srgbClr val="FAF1D1"/>
                       </a:solidFill>
                       <a:prstDash val="solid"/>
                     </a:lnL>
                     <a:lnR w="9525" cap="flat" cmpd="sng" algn="ctr">
                       <a:solidFill>
-                        <a:srgbClr val="D1FADC"/>
+                        <a:srgbClr val="FAF1D1"/>
                       </a:solidFill>
                       <a:prstDash val="solid"/>
                     </a:lnR>
                     <a:lnT w="9525" cap="flat" cmpd="sng" algn="ctr">
                       <a:solidFill>
-                        <a:srgbClr val="D1FADC"/>
+                        <a:srgbClr val="FAF1D1"/>
                       </a:solidFill>
                       <a:prstDash val="solid"/>
                     </a:lnT>
                     <a:lnB w="9525" cap="flat" cmpd="sng" algn="ctr">
                       <a:solidFill>
-                        <a:srgbClr val="D1FADC"/>
+                        <a:srgbClr val="FAF1D1"/>
                       </a:solidFill>
                       <a:prstDash val="solid"/>
                     </a:lnB>
@@ -6073,7 +6403,7 @@
                       <a:r>
                         <a:rPr sz="1500" b="0">
                           <a:solidFill>
-                            <a:srgbClr val="2B2B2B"/>
+                            <a:srgbClr val="26231F"/>
                           </a:solidFill>
                         </a:rPr>
                         <a:t/>
@@ -6083,25 +6413,25 @@
                   <a:tcPr anchor="ctr" marL="73152" marR="73152">
                     <a:lnL w="9525" cap="flat" cmpd="sng" algn="ctr">
                       <a:solidFill>
-                        <a:srgbClr val="D1FADC"/>
+                        <a:srgbClr val="FAF1D1"/>
                       </a:solidFill>
                       <a:prstDash val="solid"/>
                     </a:lnL>
                     <a:lnR w="9525" cap="flat" cmpd="sng" algn="ctr">
                       <a:solidFill>
-                        <a:srgbClr val="D1FADC"/>
+                        <a:srgbClr val="FAF1D1"/>
                       </a:solidFill>
                       <a:prstDash val="solid"/>
                     </a:lnR>
                     <a:lnT w="9525" cap="flat" cmpd="sng" algn="ctr">
                       <a:solidFill>
-                        <a:srgbClr val="D1FADC"/>
+                        <a:srgbClr val="FAF1D1"/>
                       </a:solidFill>
                       <a:prstDash val="solid"/>
                     </a:lnT>
                     <a:lnB w="9525" cap="flat" cmpd="sng" algn="ctr">
                       <a:solidFill>
-                        <a:srgbClr val="D1FADC"/>
+                        <a:srgbClr val="FAF1D1"/>
                       </a:solidFill>
                       <a:prstDash val="solid"/>
                     </a:lnB>
@@ -6121,7 +6451,7 @@
                       <a:r>
                         <a:rPr sz="1500" b="1">
                           <a:solidFill>
-                            <a:srgbClr val="115F25"/>
+                            <a:srgbClr val="494127"/>
                           </a:solidFill>
                         </a:rPr>
                         <a:t>4</a:t>
@@ -6131,30 +6461,30 @@
                   <a:tcPr anchor="ctr" marL="73152" marR="73152">
                     <a:lnL w="9525" cap="flat" cmpd="sng" algn="ctr">
                       <a:solidFill>
-                        <a:srgbClr val="D1FADC"/>
+                        <a:srgbClr val="FAF1D1"/>
                       </a:solidFill>
                       <a:prstDash val="solid"/>
                     </a:lnL>
                     <a:lnR w="9525" cap="flat" cmpd="sng" algn="ctr">
                       <a:solidFill>
-                        <a:srgbClr val="D1FADC"/>
+                        <a:srgbClr val="FAF1D1"/>
                       </a:solidFill>
                       <a:prstDash val="solid"/>
                     </a:lnR>
                     <a:lnT w="9525" cap="flat" cmpd="sng" algn="ctr">
                       <a:solidFill>
-                        <a:srgbClr val="D1FADC"/>
+                        <a:srgbClr val="FAF1D1"/>
                       </a:solidFill>
                       <a:prstDash val="solid"/>
                     </a:lnT>
                     <a:lnB w="9525" cap="flat" cmpd="sng" algn="ctr">
                       <a:solidFill>
-                        <a:srgbClr val="D1FADC"/>
+                        <a:srgbClr val="FAF1D1"/>
                       </a:solidFill>
                       <a:prstDash val="solid"/>
                     </a:lnB>
                     <a:solidFill>
-                      <a:srgbClr val="D1FADC"/>
+                      <a:srgbClr val="FAF1D1"/>
                     </a:solidFill>
                   </a:tcPr>
                 </a:tc>
@@ -6167,7 +6497,7 @@
                       <a:r>
                         <a:rPr sz="1500" b="0">
                           <a:solidFill>
-                            <a:srgbClr val="2B2B2B"/>
+                            <a:srgbClr val="26231F"/>
                           </a:solidFill>
                         </a:rPr>
                         <a:t>내용 입력</a:t>
@@ -6177,30 +6507,30 @@
                   <a:tcPr anchor="ctr" marL="73152" marR="73152">
                     <a:lnL w="9525" cap="flat" cmpd="sng" algn="ctr">
                       <a:solidFill>
-                        <a:srgbClr val="D1FADC"/>
+                        <a:srgbClr val="FAF1D1"/>
                       </a:solidFill>
                       <a:prstDash val="solid"/>
                     </a:lnL>
                     <a:lnR w="9525" cap="flat" cmpd="sng" algn="ctr">
                       <a:solidFill>
-                        <a:srgbClr val="D1FADC"/>
+                        <a:srgbClr val="FAF1D1"/>
                       </a:solidFill>
                       <a:prstDash val="solid"/>
                     </a:lnR>
                     <a:lnT w="9525" cap="flat" cmpd="sng" algn="ctr">
                       <a:solidFill>
-                        <a:srgbClr val="D1FADC"/>
+                        <a:srgbClr val="FAF1D1"/>
                       </a:solidFill>
                       <a:prstDash val="solid"/>
                     </a:lnT>
                     <a:lnB w="9525" cap="flat" cmpd="sng" algn="ctr">
                       <a:solidFill>
-                        <a:srgbClr val="D1FADC"/>
+                        <a:srgbClr val="FAF1D1"/>
                       </a:solidFill>
                       <a:prstDash val="solid"/>
                     </a:lnB>
                     <a:solidFill>
-                      <a:srgbClr val="EEFCF1"/>
+                      <a:srgbClr val="FDF8EA"/>
                     </a:solidFill>
                   </a:tcPr>
                 </a:tc>
@@ -6213,7 +6543,7 @@
                       <a:r>
                         <a:rPr sz="1500" b="0">
                           <a:solidFill>
-                            <a:srgbClr val="2B2B2B"/>
+                            <a:srgbClr val="26231F"/>
                           </a:solidFill>
                         </a:rPr>
                         <a:t/>
@@ -6223,30 +6553,30 @@
                   <a:tcPr anchor="ctr" marL="73152" marR="73152">
                     <a:lnL w="9525" cap="flat" cmpd="sng" algn="ctr">
                       <a:solidFill>
-                        <a:srgbClr val="D1FADC"/>
+                        <a:srgbClr val="FAF1D1"/>
                       </a:solidFill>
                       <a:prstDash val="solid"/>
                     </a:lnL>
                     <a:lnR w="9525" cap="flat" cmpd="sng" algn="ctr">
                       <a:solidFill>
-                        <a:srgbClr val="D1FADC"/>
+                        <a:srgbClr val="FAF1D1"/>
                       </a:solidFill>
                       <a:prstDash val="solid"/>
                     </a:lnR>
                     <a:lnT w="9525" cap="flat" cmpd="sng" algn="ctr">
                       <a:solidFill>
-                        <a:srgbClr val="D1FADC"/>
+                        <a:srgbClr val="FAF1D1"/>
                       </a:solidFill>
                       <a:prstDash val="solid"/>
                     </a:lnT>
                     <a:lnB w="9525" cap="flat" cmpd="sng" algn="ctr">
                       <a:solidFill>
-                        <a:srgbClr val="D1FADC"/>
+                        <a:srgbClr val="FAF1D1"/>
                       </a:solidFill>
                       <a:prstDash val="solid"/>
                     </a:lnB>
                     <a:solidFill>
-                      <a:srgbClr val="EEFCF1"/>
+                      <a:srgbClr val="FDF8EA"/>
                     </a:solidFill>
                   </a:tcPr>
                 </a:tc>
@@ -6259,7 +6589,7 @@
                       <a:r>
                         <a:rPr sz="1500" b="0">
                           <a:solidFill>
-                            <a:srgbClr val="2B2B2B"/>
+                            <a:srgbClr val="26231F"/>
                           </a:solidFill>
                         </a:rPr>
                         <a:t/>
@@ -6269,30 +6599,30 @@
                   <a:tcPr anchor="ctr" marL="73152" marR="73152">
                     <a:lnL w="9525" cap="flat" cmpd="sng" algn="ctr">
                       <a:solidFill>
-                        <a:srgbClr val="D1FADC"/>
+                        <a:srgbClr val="FAF1D1"/>
                       </a:solidFill>
                       <a:prstDash val="solid"/>
                     </a:lnL>
                     <a:lnR w="9525" cap="flat" cmpd="sng" algn="ctr">
                       <a:solidFill>
-                        <a:srgbClr val="D1FADC"/>
+                        <a:srgbClr val="FAF1D1"/>
                       </a:solidFill>
                       <a:prstDash val="solid"/>
                     </a:lnR>
                     <a:lnT w="9525" cap="flat" cmpd="sng" algn="ctr">
                       <a:solidFill>
-                        <a:srgbClr val="D1FADC"/>
+                        <a:srgbClr val="FAF1D1"/>
                       </a:solidFill>
                       <a:prstDash val="solid"/>
                     </a:lnT>
                     <a:lnB w="9525" cap="flat" cmpd="sng" algn="ctr">
                       <a:solidFill>
-                        <a:srgbClr val="D1FADC"/>
+                        <a:srgbClr val="FAF1D1"/>
                       </a:solidFill>
                       <a:prstDash val="solid"/>
                     </a:lnB>
                     <a:solidFill>
-                      <a:srgbClr val="EEFCF1"/>
+                      <a:srgbClr val="FDF8EA"/>
                     </a:solidFill>
                   </a:tcPr>
                 </a:tc>
@@ -6307,7 +6637,7 @@
                       <a:r>
                         <a:rPr sz="1500" b="1">
                           <a:solidFill>
-                            <a:srgbClr val="115F25"/>
+                            <a:srgbClr val="494127"/>
                           </a:solidFill>
                         </a:rPr>
                         <a:t>5</a:t>
@@ -6317,30 +6647,30 @@
                   <a:tcPr anchor="ctr" marL="73152" marR="73152">
                     <a:lnL w="9525" cap="flat" cmpd="sng" algn="ctr">
                       <a:solidFill>
-                        <a:srgbClr val="D1FADC"/>
+                        <a:srgbClr val="FAF1D1"/>
                       </a:solidFill>
                       <a:prstDash val="solid"/>
                     </a:lnL>
                     <a:lnR w="9525" cap="flat" cmpd="sng" algn="ctr">
                       <a:solidFill>
-                        <a:srgbClr val="D1FADC"/>
+                        <a:srgbClr val="FAF1D1"/>
                       </a:solidFill>
                       <a:prstDash val="solid"/>
                     </a:lnR>
                     <a:lnT w="9525" cap="flat" cmpd="sng" algn="ctr">
                       <a:solidFill>
-                        <a:srgbClr val="D1FADC"/>
+                        <a:srgbClr val="FAF1D1"/>
                       </a:solidFill>
                       <a:prstDash val="solid"/>
                     </a:lnT>
                     <a:lnB w="9525" cap="flat" cmpd="sng" algn="ctr">
                       <a:solidFill>
-                        <a:srgbClr val="D1FADC"/>
+                        <a:srgbClr val="FAF1D1"/>
                       </a:solidFill>
                       <a:prstDash val="solid"/>
                     </a:lnB>
                     <a:solidFill>
-                      <a:srgbClr val="D1FADC"/>
+                      <a:srgbClr val="FAF1D1"/>
                     </a:solidFill>
                   </a:tcPr>
                 </a:tc>
@@ -6353,7 +6683,7 @@
                       <a:r>
                         <a:rPr sz="1500" b="0">
                           <a:solidFill>
-                            <a:srgbClr val="2B2B2B"/>
+                            <a:srgbClr val="26231F"/>
                           </a:solidFill>
                         </a:rPr>
                         <a:t>내용 입력</a:t>
@@ -6363,25 +6693,25 @@
                   <a:tcPr anchor="ctr" marL="73152" marR="73152">
                     <a:lnL w="9525" cap="flat" cmpd="sng" algn="ctr">
                       <a:solidFill>
-                        <a:srgbClr val="D1FADC"/>
+                        <a:srgbClr val="FAF1D1"/>
                       </a:solidFill>
                       <a:prstDash val="solid"/>
                     </a:lnL>
                     <a:lnR w="9525" cap="flat" cmpd="sng" algn="ctr">
                       <a:solidFill>
-                        <a:srgbClr val="D1FADC"/>
+                        <a:srgbClr val="FAF1D1"/>
                       </a:solidFill>
                       <a:prstDash val="solid"/>
                     </a:lnR>
                     <a:lnT w="9525" cap="flat" cmpd="sng" algn="ctr">
                       <a:solidFill>
-                        <a:srgbClr val="D1FADC"/>
+                        <a:srgbClr val="FAF1D1"/>
                       </a:solidFill>
                       <a:prstDash val="solid"/>
                     </a:lnT>
                     <a:lnB w="9525" cap="flat" cmpd="sng" algn="ctr">
                       <a:solidFill>
-                        <a:srgbClr val="D1FADC"/>
+                        <a:srgbClr val="FAF1D1"/>
                       </a:solidFill>
                       <a:prstDash val="solid"/>
                     </a:lnB>
@@ -6399,7 +6729,7 @@
                       <a:r>
                         <a:rPr sz="1500" b="0">
                           <a:solidFill>
-                            <a:srgbClr val="2B2B2B"/>
+                            <a:srgbClr val="26231F"/>
                           </a:solidFill>
                         </a:rPr>
                         <a:t/>
@@ -6409,25 +6739,25 @@
                   <a:tcPr anchor="ctr" marL="73152" marR="73152">
                     <a:lnL w="9525" cap="flat" cmpd="sng" algn="ctr">
                       <a:solidFill>
-                        <a:srgbClr val="D1FADC"/>
+                        <a:srgbClr val="FAF1D1"/>
                       </a:solidFill>
                       <a:prstDash val="solid"/>
                     </a:lnL>
                     <a:lnR w="9525" cap="flat" cmpd="sng" algn="ctr">
                       <a:solidFill>
-                        <a:srgbClr val="D1FADC"/>
+                        <a:srgbClr val="FAF1D1"/>
                       </a:solidFill>
                       <a:prstDash val="solid"/>
                     </a:lnR>
                     <a:lnT w="9525" cap="flat" cmpd="sng" algn="ctr">
                       <a:solidFill>
-                        <a:srgbClr val="D1FADC"/>
+                        <a:srgbClr val="FAF1D1"/>
                       </a:solidFill>
                       <a:prstDash val="solid"/>
                     </a:lnT>
                     <a:lnB w="9525" cap="flat" cmpd="sng" algn="ctr">
                       <a:solidFill>
-                        <a:srgbClr val="D1FADC"/>
+                        <a:srgbClr val="FAF1D1"/>
                       </a:solidFill>
                       <a:prstDash val="solid"/>
                     </a:lnB>
@@ -6445,7 +6775,7 @@
                       <a:r>
                         <a:rPr sz="1500" b="0">
                           <a:solidFill>
-                            <a:srgbClr val="2B2B2B"/>
+                            <a:srgbClr val="26231F"/>
                           </a:solidFill>
                         </a:rPr>
                         <a:t/>
@@ -6455,25 +6785,25 @@
                   <a:tcPr anchor="ctr" marL="73152" marR="73152">
                     <a:lnL w="9525" cap="flat" cmpd="sng" algn="ctr">
                       <a:solidFill>
-                        <a:srgbClr val="D1FADC"/>
+                        <a:srgbClr val="FAF1D1"/>
                       </a:solidFill>
                       <a:prstDash val="solid"/>
                     </a:lnL>
                     <a:lnR w="9525" cap="flat" cmpd="sng" algn="ctr">
                       <a:solidFill>
-                        <a:srgbClr val="D1FADC"/>
+                        <a:srgbClr val="FAF1D1"/>
                       </a:solidFill>
                       <a:prstDash val="solid"/>
                     </a:lnR>
                     <a:lnT w="9525" cap="flat" cmpd="sng" algn="ctr">
                       <a:solidFill>
-                        <a:srgbClr val="D1FADC"/>
+                        <a:srgbClr val="FAF1D1"/>
                       </a:solidFill>
                       <a:prstDash val="solid"/>
                     </a:lnT>
                     <a:lnB w="9525" cap="flat" cmpd="sng" algn="ctr">
                       <a:solidFill>
-                        <a:srgbClr val="D1FADC"/>
+                        <a:srgbClr val="FAF1D1"/>
                       </a:solidFill>
                       <a:prstDash val="solid"/>
                     </a:lnB>
@@ -6498,6 +6828,14 @@
 <file path=ppt/slides/slide6.xml><?xml version="1.0" encoding="utf-8"?>
 <p:sld xmlns:a="http://schemas.openxmlformats.org/drawingml/2006/main" xmlns:p="http://schemas.openxmlformats.org/presentationml/2006/main" xmlns:r="http://schemas.openxmlformats.org/officeDocument/2006/relationships">
   <p:cSld>
+    <p:bg>
+      <p:bgPr>
+        <a:solidFill>
+          <a:srgbClr val="FDF8EA"/>
+        </a:solidFill>
+        <a:effectLst/>
+      </p:bgPr>
+    </p:bg>
     <p:spTree>
       <p:nvGrpSpPr>
         <p:cNvPr id="1" name=""/>
@@ -6505,30 +6843,102 @@
         <p:nvPr/>
       </p:nvGrpSpPr>
       <p:grpSpPr/>
-      <p:pic>
-        <p:nvPicPr>
-          <p:cNvPr id="3" name="표지 그림" descr="talk-17.jpg"/>
-          <p:cNvPicPr>
-            <a:picLocks noChangeAspect="1"/>
-          </p:cNvPicPr>
+      <p:sp>
+        <p:nvSpPr>
+          <p:cNvPr id="3" name="장식"/>
+          <p:cNvSpPr/>
           <p:nvPr/>
-        </p:nvPicPr>
-        <p:blipFill>
-          <a:blip r:embed="rId2"/>
-          <a:stretch>
-            <a:fillRect/>
-          </a:stretch>
-        </p:blipFill>
-        <p:spPr>
-          <a:xfrm>
-            <a:off x="0" y="0"/>
-            <a:ext cx="12191695" cy="6858000"/>
+        </p:nvSpPr>
+        <p:spPr>
+          <a:xfrm>
+            <a:off x="5684367" y="1097280"/>
+            <a:ext cx="822960" cy="822960"/>
+          </a:xfrm>
+          <a:prstGeom prst="ellipse">
+            <a:avLst/>
+          </a:prstGeom>
+          <a:solidFill>
+            <a:srgbClr val="EAD07B"/>
+          </a:solidFill>
+          <a:ln>
+            <a:noFill/>
+          </a:ln>
+        </p:spPr>
+        <p:txBody>
+          <a:bodyPr rtlCol="0" anchor="ctr"/>
+          <a:lstStyle/>
+          <a:p>
+            <a:pPr algn="ctr"/>
+          </a:p>
+        </p:txBody>
+      </p:sp>
+      <p:sp>
+        <p:nvSpPr>
+          <p:cNvPr id="4" name="장식"/>
+          <p:cNvSpPr/>
+          <p:nvPr/>
+        </p:nvSpPr>
+        <p:spPr>
+          <a:xfrm>
+            <a:off x="5547207" y="4663440"/>
+            <a:ext cx="1097280" cy="18288"/>
           </a:xfrm>
           <a:prstGeom prst="rect">
             <a:avLst/>
           </a:prstGeom>
-        </p:spPr>
-      </p:pic>
+          <a:solidFill>
+            <a:srgbClr val="26231F"/>
+          </a:solidFill>
+          <a:ln>
+            <a:noFill/>
+          </a:ln>
+        </p:spPr>
+        <p:txBody>
+          <a:bodyPr rtlCol="0" anchor="ctr"/>
+          <a:lstStyle/>
+          <a:p>
+            <a:pPr algn="ctr"/>
+          </a:p>
+        </p:txBody>
+      </p:sp>
+      <p:sp>
+        <p:nvSpPr>
+          <p:cNvPr id="5" name="라벨"/>
+          <p:cNvSpPr txBox="1"/>
+          <p:nvPr/>
+        </p:nvSpPr>
+        <p:spPr>
+          <a:xfrm>
+            <a:off x="1828754" y="1874520"/>
+            <a:ext cx="8534186" cy="274320"/>
+          </a:xfrm>
+          <a:prstGeom prst="rect">
+            <a:avLst/>
+          </a:prstGeom>
+          <a:noFill/>
+        </p:spPr>
+        <p:txBody>
+          <a:bodyPr wrap="square" lIns="54864" rIns="54864" tIns="27432" bIns="27432" anchor="t">
+            <a:noAutofit/>
+          </a:bodyPr>
+          <a:lstStyle/>
+          <a:p>
+            <a:pPr algn="ctr">
+              <a:lnSpc>
+                <a:spcPct val="115000"/>
+              </a:lnSpc>
+            </a:pPr>
+            <a:r>
+              <a:rPr sz="1000" b="1" i="0" spc="250">
+                <a:solidFill>
+                  <a:srgbClr val="26231F"/>
+                </a:solidFill>
+              </a:rPr>
+              <a:t>PRESENTATION</a:t>
+            </a:r>
+          </a:p>
+        </p:txBody>
+      </p:sp>
       <p:sp>
         <p:nvSpPr>
           <p:cNvPr id="2" name="Title 1"/>
@@ -6541,8 +6951,8 @@
         </p:nvSpPr>
         <p:spPr>
           <a:xfrm>
-            <a:off x="853418" y="2057400"/>
-            <a:ext cx="6095847" cy="1554480"/>
+            <a:off x="1828754" y="2331720"/>
+            <a:ext cx="8534186" cy="1188720"/>
           </a:xfrm>
         </p:spPr>
         <p:txBody>
@@ -6551,15 +6961,15 @@
           </a:bodyPr>
           <a:lstStyle/>
           <a:p>
-            <a:pPr algn="l">
+            <a:pPr algn="ctr">
               <a:lnSpc>
                 <a:spcPct val="105000"/>
               </a:lnSpc>
             </a:pPr>
             <a:r>
-              <a:rPr sz="3600" b="1" i="0">
+              <a:rPr sz="4000" b="1" i="0">
                 <a:solidFill>
-                  <a:srgbClr val="115F25"/>
+                  <a:srgbClr val="26231F"/>
                 </a:solidFill>
               </a:rPr>
               <a:t>감사합니다</a:t>
@@ -6569,14 +6979,14 @@
       </p:sp>
       <p:sp>
         <p:nvSpPr>
-          <p:cNvPr id="4" name="한 줄 문구"/>
+          <p:cNvPr id="6" name="한 줄 문구"/>
           <p:cNvSpPr txBox="1"/>
           <p:nvPr/>
         </p:nvSpPr>
         <p:spPr>
           <a:xfrm>
-            <a:off x="853418" y="3749039"/>
-            <a:ext cx="6095847" cy="822960"/>
+            <a:off x="1828754" y="3611880"/>
+            <a:ext cx="8534186" cy="822960"/>
           </a:xfrm>
           <a:prstGeom prst="rect">
             <a:avLst/>
@@ -6589,15 +6999,15 @@
           </a:bodyPr>
           <a:lstStyle/>
           <a:p>
-            <a:pPr algn="l">
+            <a:pPr algn="ctr">
               <a:lnSpc>
                 <a:spcPct val="115000"/>
               </a:lnSpc>
             </a:pPr>
             <a:r>
-              <a:rPr sz="1700" b="0" i="1">
+              <a:rPr sz="1700" b="0" i="0">
                 <a:solidFill>
-                  <a:srgbClr val="115F25"/>
+                  <a:srgbClr val="26231F"/>
                 </a:solidFill>
               </a:rPr>
               <a:t>끝까지 들어 주셔서 고맙습니다</a:t>
@@ -6607,14 +7017,14 @@
       </p:sp>
       <p:sp>
         <p:nvSpPr>
-          <p:cNvPr id="5" name="안내 문구"/>
+          <p:cNvPr id="7" name="안내 문구"/>
           <p:cNvSpPr txBox="1"/>
           <p:nvPr/>
         </p:nvSpPr>
         <p:spPr>
           <a:xfrm>
-            <a:off x="853418" y="4617720"/>
-            <a:ext cx="6095847" cy="914400"/>
+            <a:off x="1828754" y="4480560"/>
+            <a:ext cx="8534186" cy="914400"/>
           </a:xfrm>
           <a:prstGeom prst="rect">
             <a:avLst/>
@@ -6627,7 +7037,7 @@
           </a:bodyPr>
           <a:lstStyle/>
           <a:p>
-            <a:pPr algn="l">
+            <a:pPr algn="ctr">
               <a:lnSpc>
                 <a:spcPct val="115000"/>
               </a:lnSpc>
@@ -6635,7 +7045,7 @@
             <a:r>
               <a:rPr sz="1400" b="0" i="0">
                 <a:solidFill>
-                  <a:srgbClr val="666666"/>
+                  <a:srgbClr val="26231F"/>
                 </a:solidFill>
               </a:rPr>
               <a:t>문의 · 연락처를 입력하세요</a:t>
@@ -6662,34 +7072,34 @@
         <a:sysClr val="window" lastClr="FFFFFF"/>
       </a:lt1>
       <a:dk2>
-        <a:srgbClr val="115F25"/>
+        <a:srgbClr val="494127"/>
       </a:dk2>
       <a:lt2>
-        <a:srgbClr val="EEFCF1"/>
+        <a:srgbClr val="FDF8EA"/>
       </a:lt2>
       <a:accent1>
-        <a:srgbClr val="26C54E"/>
+        <a:srgbClr val="EAD07B"/>
       </a:accent1>
       <a:accent2>
-        <a:srgbClr val="209DB6"/>
+        <a:srgbClr val="DCEF9F"/>
       </a:accent2>
       <a:accent3>
-        <a:srgbClr val="115F25"/>
+        <a:srgbClr val="494127"/>
       </a:accent3>
       <a:accent4>
-        <a:srgbClr val="D1FADC"/>
+        <a:srgbClr val="FAF1D1"/>
       </a:accent4>
       <a:accent5>
-        <a:srgbClr val="23B182"/>
+        <a:srgbClr val="E3E08D"/>
       </a:accent5>
       <a:accent6>
-        <a:srgbClr val="709F7C"/>
+        <a:srgbClr val="928D7D"/>
       </a:accent6>
       <a:hlink>
-        <a:srgbClr val="26C54E"/>
+        <a:srgbClr val="EAD07B"/>
       </a:hlink>
       <a:folHlink>
-        <a:srgbClr val="115F25"/>
+        <a:srgbClr val="494127"/>
       </a:folHlink>
     </a:clrScheme>
     <a:fontScheme name="Office">
